--- a/docs-site/static/presentation/awsops-intro/awsops-intro.pptx
+++ b/docs-site/static/presentation/awsops-intro/awsops-intro.pptx
@@ -821,7 +821,7 @@
 • 도메인별 게이트웨이 9종이 각자 전문 도구로 라이브 조회
 • 챗 16섹션 = 게이트웨이 9 + aws-data + 콜렉터 6
 • 자연어→SQL은 SELECT-only 가드로 안전하게 실행
-AI 레이어의 핵심은 '분업'입니다. 범용 챗봇 하나가 모든 질문을 받는 게 아니라, 네트워크·컨테이너·데이터·보안·비용·모니터링·IaC·운영·외부관측 아홉 개 도메인 게이트웨이가 각자 전문 도구를 들고 있습니다. 질문이 오면 해당 도메인 에이전트가 라이브 AWS 데이터를 직접 조회해서 답합니다. 여기에 두 가지가 더 있습니다. aws-data는 자연어를 SQL로 바꿔 인벤토리에 직접 실행하는데, SELECT만 허용되는 가드가 걸려 있습니다. 그리고 유휴 리소스 스캔이나 인시던트 분석 같은 여섯 개 콜렉터는 근거 데이터를 자동으로 수집한 뒤 분석을 시작합니다. 합쳐서 16개 섹션이 전부 활성 상태입니다. 모델은 Bedrock의 Claude 계열을 용도별로 혼용합니다.
+AI 레이어의 핵심은 '분업'입니다. 범용 챗봇 하나가 모든 질문을 받는 게 아니라, 네트워크·컨테이너·데이터·보안·비용·모니터링·IaC·운영·외부관측 아홉 개 도메인 게이트웨이가 각자 전문 도구를 들고 있습니다. 질문이 오면 해당 도메인 에이전트가 라이브 AWS 데이터를 직접 조회해서 답합니다. 여기에 두 가지가 더 있습니다. aws-data는 리소스 수량·목록 질문을 받는 generic 섹션이고 — 라이브 AWS 조회는 어디까지나 AgentCore 게이트웨이 경유가 원칙입니다. 그리고 유휴 리소스 스캔이나 인시던트 분석 같은 여섯 개 콜렉터는 근거 데이터를 자동으로 수집한 뒤 분석을 시작합니다. 합쳐서 16개 섹션 구성입니다. 모델은 Bedrock의 Claude 계열을 용도별로 혼용합니다.
 [약어]
 • MCP(Model Context Protocol): AI 에이전트가 도구를 호출하는 표준 프로토콜
 • MSK(Managed Streaming for Apache Kafka): AWS 관리형 Kafka 서비스
@@ -920,7 +920,7 @@
 • 웹은 접수만, 분석은 SQS→Step Functions 워커가 수행
 • 워커가 죽어도 대시보드는 무영향 (장애 격리)
 • 작업 상태 원장 + 5분 reaper로 끝까지 정합
-운영 도구가 흔히 겪는 함정이 있습니다 — 진단 기능을 붙였더니 진단이 무거워서 도구 자체가 죽는 경우입니다. AWSops는 처음부터 이를 구조로 풀었습니다. 웹 대시보드는 작업을 접수만 하고 즉시 응답합니다. 실제 분석은 SQS 큐를 지나 Step Functions가 작업 성격에 따라 Lambda 또는 Fargate 워커를 골라 실행합니다. 15개 섹션짜리 심층 진단이나 CIS 벤치마크처럼 몇 분씩 걸리는 작업이 워커에서 메모리 부족으로 죽어도, 여러분이 보고 있는 화면에는 아무 일도 일어나지 않습니다. 모든 작업은 상태 원장에 기록되고 5분마다 reaper가 유실된 작업을 정리해서, 성공은 성공으로 실패는 실패로 정확히 남습니다.
+운영 도구가 흔히 겪는 함정이 있습니다 — 진단 기능을 붙였더니 진단이 무거워서 도구 자체가 죽는 경우입니다. AWSops는 처음부터 이를 구조로 풀었습니다. 웹 대시보드는 작업을 접수만 하고 즉시 응답합니다. 실제 분석은 SQS 큐를 지나 Step Functions가 작업 성격에 따라 Lambda 또는 Fargate 워커를 골라 실행합니다. 15+1섹션짜리 심층 진단이나 CIS 벤치마크처럼 몇 분씩 걸리는 작업이 워커에서 메모리 부족으로 죽어도, 여러분이 보고 있는 화면에는 아무 일도 일어나지 않습니다. 모든 작업은 상태 원장에 기록되고 5분마다 reaper가 유실된 작업을 정리해서, 성공은 성공으로 실패는 실패로 정확히 남습니다.
 [약어]
 • OOM(Out Of Memory): 메모리 고갈로 인한 프로세스 강제 종료
 • ESM(Event Source Mapping): Lambda와 큐를 잇는 트리거 연결(킬스위치 지점)
@@ -1019,7 +1019,7 @@
 • 변경 기능은 거버넌스(ADR)로 동결 — 실수로 켤 수 없음
 • K8s GET-only · 계정 연결은 ReadOnly 역할 1개 + 검증
 • AI 오답의 최악 = 틀린 조언 (틀린 변경이 아님)
-실무자 여러분께 가장 중요한 슬라이드입니다. AWSops에 변경 기능이 '없는' 것은 미완성이 아니라 설계 결정입니다. 자동 변경은 두 번째 장애의 가장 흔한 원인이고, 운영자가 도구를 신뢰하지 못하면 결국 쓰지 않게 됩니다. 그래서 변경·자동 조치 기능은 아키텍처 결정 기록으로 동결되어 있고, 해제하려면 별도 승인 절차가 필요합니다. 쿠버네티스에는 GET만 발행하고, 계정 연결에 요구하는 것도 읽기 전용 역할 하나뿐입니다. 등록 시점에 실제로 역할을 assume해 봐서 성공해야만 연결됩니다. 이 원칙 덕분에 AI가 틀려도 최악의 경우가 '틀린 조언'입니다 — 인프라에는 아무 일도 일어나지 않습니다. 변경은 사람과 기존 IaC 파이프라인의 몫으로 남기고, AWSops는 판단 근거를 극단적으로 잘 만드는 데 집중합니다.
+실무자 여러분께 가장 중요한 슬라이드입니다. AWSops에 변경 기능이 '없는' 것은 미완성이 아니라 설계 결정입니다. 자동 변경은 두 번째 장애의 가장 흔한 원인이고, 운영자가 도구를 신뢰하지 못하면 결국 쓰지 않게 됩니다. 그래서 변경·자동 조치 기능은 아키텍처 결정 기록으로 동결되어 있고, 해제하려면 별도 승인 절차가 필요합니다. 쿠버네티스에는 GET만 발행하고, 계정 연결에 요구하는 것도 읽기 전용 역할 하나뿐입니다. 유일한 문서화된 예외는 ADR-015 — 데이터베이스 시크릿 회전 때 자기 자신의 웹 서비스를 재시작하는 것 하나이며, 기본 꺼짐에 IAM도 해당 서비스 ARN 하나로 한정됩니다. 등록 시점에 실제로 역할을 assume해 봐서 성공해야만 연결됩니다. 이 원칙 덕분에 AI가 틀려도 최악의 경우가 '틀린 조언'입니다 — 인프라에는 아무 일도 일어나지 않습니다. 변경은 사람과 기존 IaC 파이프라인의 몫으로 남기고, AWSops는 판단 근거를 극단적으로 잘 만드는 데 집중합니다.
 [약어]
 • ADR(Architecture Decision Record): 아키텍처 결정과 근거를 남기는 공식 기록
 [출처]
@@ -1497,8 +1497,8 @@
               <a:t>[요약]
 • 페인 4개의 총결산 — WA 6기둥 자동 채점 리포트
 • 발견 = 심각도 + 우선순위 + 공수 + 근거 + 절감액
-• 매주 자동 실행 + 악화/해소 추세 추적
-네 번째 가치는 Well-Architected 자동 진단입니다. 파트너 리뷰의 문제는 리뷰가 끝난 지 석 달이면 문서가 낡는다는 것입니다. AWSops는 같은 6기둥 채점을 매주 자동으로 돌립니다. 리포트 첫 장에는 0에서 100 사이의 인프라 건강 점수가 나오는데, 신호가 없는 기둥은 점수를 지어내지 않고 '데이터 부족'으로 명시합니다 — 날조하지 않는 것이 원칙입니다. 모든 발견에는 심각도, 우선순위, 공수, 근거가 붙어서 그대로 백로그에 넣을 수 있고, 비용 관련 발견에는 절감액 추정이 첨부됩니다. 이전 리포트 대비 무엇이 악화되고 해소됐는지 추적되므로, 일회성 컨설팅이 아니라 상시 건강 관리가 됩니다. PDF로 내보내면 그대로 경영 보고서입니다. 데모 마지막에 실제 리포트를 보여드리겠습니다.
+• 매주 자동 실행 + 리포트 간 변화 추적
+네 번째 가치는 Well-Architected 자동 진단입니다. 파트너 리뷰의 문제는 리뷰가 끝난 지 석 달이면 문서가 낡는다는 것입니다. AWSops는 같은 6기둥 채점을 매주 자동으로 돌립니다. 리포트 첫 장에는 0에서 100 사이의 인프라 건강 점수가 나오는데, 신호가 없는 기둥은 점수를 지어내지 않고 '데이터 부족'으로 명시합니다 — 날조하지 않는 것이 원칙입니다. 모든 발견에는 심각도, 우선순위, 공수, 근거가 붙어서 그대로 백로그에 넣을 수 있고, 비용 관련 발견에는 절감액 추정이 첨부됩니다. 이전 리포트 대비 변화 — 특히 의도 대비 실제 위반 — 가 추적되므로, 일회성 컨설팅이 아니라 상시 건강 관리가 됩니다. PDF로 내보내면 그대로 경영 보고서입니다. 데모 마지막에 실제 리포트를 보여드리겠습니다.
 [약어]
 • WA(Well-Architected): AWS 6기둥 아키텍처 모범사례 프레임워크
 [출처]
@@ -3840,7 +3840,7 @@
                 <a:ea typeface="Pretendard" pitchFamily="34" charset="-122"/>
                 <a:cs typeface="Pretendard" pitchFamily="34" charset="-120"/>
               </a:rPr>
-              <a:t>프라이빗 엣지 — 퍼블릭 진입점 없음 (VPC Origin 전용)</a:t>
+              <a:t>프라이빗 엣지 — 퍼블릭 ALB 없음 (VPC Origin 전용)</a:t>
             </a:r>
             <a:endParaRPr lang="en-US" sz="750" dirty="0"/>
           </a:p>
@@ -4323,7 +4323,7 @@
                 <a:ea typeface="Pretendard" pitchFamily="34" charset="-122"/>
                 <a:cs typeface="Pretendard" pitchFamily="34" charset="-120"/>
               </a:rPr>
-              <a:t>모든 조회는 읽기 전용 API — 리소스 변경 기능 없음</a:t>
+              <a:t>모니터링 대상 계정 조회는 읽기 전용 API — 변경 기능은 거버넌스 동결</a:t>
             </a:r>
             <a:endParaRPr lang="en-US" sz="750" dirty="0"/>
           </a:p>
@@ -4446,7 +4446,7 @@
                 <a:ea typeface="Pretendard" pitchFamily="34" charset="-122"/>
                 <a:cs typeface="Pretendard" pitchFamily="34" charset="-120"/>
               </a:rPr>
-              <a:t>CloudFront VPC Origin → 내부 ALB → Fargate. 퍼블릭 진입점 없음</a:t>
+              <a:t>CloudFront VPC Origin → 내부 ALB → Fargate. 퍼블릭 ALB 없음</a:t>
             </a:r>
             <a:endParaRPr lang="en-US" sz="850" dirty="0"/>
           </a:p>
@@ -4893,7 +4893,7 @@
                 <a:ea typeface="Pretendard" pitchFamily="34" charset="-122"/>
                 <a:cs typeface="Pretendard" pitchFamily="34" charset="-120"/>
               </a:rPr>
-              <a:t>퍼블릭 로드밸런서 · 공개 진입점</a:t>
+              <a:t>퍼블릭 로드밸런서 (진입은 CloudFront만)</a:t>
             </a:r>
             <a:endParaRPr lang="en-US" sz="750" dirty="0"/>
           </a:p>
@@ -7387,7 +7387,7 @@
                 <a:ea typeface="Pretendard" pitchFamily="34" charset="-122"/>
                 <a:cs typeface="Pretendard" pitchFamily="34" charset="-120"/>
               </a:rPr>
-              <a:t>aws-data — 자연어 → SQL</a:t>
+              <a:t>aws-data — 리소스 질의 섹션</a:t>
             </a:r>
             <a:endParaRPr lang="en-US" sz="1200" dirty="0"/>
           </a:p>
@@ -7429,7 +7429,7 @@
                 <a:ea typeface="Pretendard" pitchFamily="34" charset="-122"/>
                 <a:cs typeface="Pretendard" pitchFamily="34" charset="-120"/>
               </a:rPr>
-              <a:t>"리전별 EC2 몇 개야?" 한 줄이면 AI가 인벤토리 SQL을 생성해 라이브 실행(SELECT-only 가드 + 200행 캡). 분석까지 스트리밍</a:t>
+              <a:t>"리전별 EC2 몇 개야?" 같은 수량·목록 질문을 받는 generic 섹션. 라이브 AWS 조회는 AgentCore 게이트웨이 경유가 원칙(ADR-001/010) — 별도 SQL 라이브 실행 경로는 설계상 차단</a:t>
             </a:r>
             <a:endParaRPr lang="en-US" sz="950" dirty="0"/>
           </a:p>
@@ -7555,7 +7555,7 @@
                 <a:ea typeface="Pretendard" pitchFamily="34" charset="-122"/>
                 <a:cs typeface="Pretendard" pitchFamily="34" charset="-120"/>
               </a:rPr>
-              <a:t>유휴 리소스 스캔 · EKS/DB/MSK 최적화 · 지연 분석 · 인시던트 — 근거 데이터를 자동 수집한 뒤 분석. 총 16개 챗 섹션 전부 활성</a:t>
+              <a:t>유휴 리소스 스캔 · EKS/DB/MSK 최적화 · 지연 분석 · 인시던트 — 근거 데이터를 자동 수집한 뒤 분석. 총 16개 챗 섹션 구성</a:t>
             </a:r>
             <a:endParaRPr lang="en-US" sz="950" dirty="0"/>
           </a:p>
@@ -7672,7 +7672,7 @@
                 <a:ea typeface="Pretendard" pitchFamily="34" charset="-122"/>
                 <a:cs typeface="Pretendard" pitchFamily="34" charset="-120"/>
               </a:rPr>
-              <a:t>16/16</a:t>
+              <a:t>16</a:t>
             </a:r>
             <a:endParaRPr lang="en-US" sz="1600" dirty="0"/>
           </a:p>
@@ -7711,7 +7711,7 @@
                 <a:ea typeface="Pretendard" pitchFamily="34" charset="-122"/>
                 <a:cs typeface="Pretendard" pitchFamily="34" charset="-120"/>
               </a:rPr>
-              <a:t>활성 챗 섹션 키</a:t>
+              <a:t>챗 섹션 키 (게이트웨이 9 + 로컬 7)</a:t>
             </a:r>
             <a:endParaRPr lang="en-US" sz="750" dirty="0"/>
           </a:p>
@@ -7828,7 +7828,7 @@
                 <a:ea typeface="Pretendard" pitchFamily="34" charset="-122"/>
                 <a:cs typeface="Pretendard" pitchFamily="34" charset="-120"/>
               </a:rPr>
-              <a:t>SELECT-only</a:t>
+              <a:t>in-account</a:t>
             </a:r>
             <a:endParaRPr lang="en-US" sz="1600" dirty="0"/>
           </a:p>
@@ -7867,7 +7867,7 @@
                 <a:ea typeface="Pretendard" pitchFamily="34" charset="-122"/>
                 <a:cs typeface="Pretendard" pitchFamily="34" charset="-120"/>
               </a:rPr>
-              <a:t>aws-data SQL 실행 가드</a:t>
+              <a:t>Bedrock 계정 내 AI 호출 — 외부 AI SaaS 없음</a:t>
             </a:r>
             <a:endParaRPr lang="en-US" sz="750" dirty="0"/>
           </a:p>
@@ -8809,7 +8809,7 @@
                 <a:ea typeface="Pretendard" pitchFamily="34" charset="-122"/>
                 <a:cs typeface="Pretendard" pitchFamily="34" charset="-120"/>
               </a:rPr>
-              <a:t>15섹션 심층 진단·CIS 벤치마크처럼 무겁고 긴 작업이 워커에서 실패해도 대시보드 가용성에는 영향 없음 — 웹은 접수만 하고 즉시 응답</a:t>
+              <a:t>15+1섹션 심층 진단·CIS 벤치마크처럼 무겁고 긴 작업이 워커에서 실패해도 대시보드 가용성에는 영향 없음 — 웹은 접수만 하고 즉시 응답</a:t>
             </a:r>
             <a:endParaRPr lang="en-US" sz="1100" dirty="0"/>
           </a:p>
@@ -9122,7 +9122,7 @@
                 <a:ea typeface="Pretendard" pitchFamily="34" charset="-122"/>
                 <a:cs typeface="Pretendard" pitchFamily="34" charset="-120"/>
               </a:rPr>
-              <a:t>15</a:t>
+              <a:t>15+1</a:t>
             </a:r>
             <a:endParaRPr lang="en-US" sz="1600" dirty="0"/>
           </a:p>
@@ -9161,7 +9161,7 @@
                 <a:ea typeface="Pretendard" pitchFamily="34" charset="-122"/>
                 <a:cs typeface="Pretendard" pitchFamily="34" charset="-120"/>
               </a:rPr>
-              <a:t>Deep 진단 리포트 섹션 수</a:t>
+              <a:t>Deep 진단 리포트 섹션 수 (의도 대비 실제 포함)</a:t>
             </a:r>
             <a:endParaRPr lang="en-US" sz="750" dirty="0"/>
           </a:p>
@@ -9553,7 +9553,7 @@
                 <a:ea typeface="Pretendard" pitchFamily="34" charset="-122"/>
                 <a:cs typeface="Pretendard" pitchFamily="34" charset="-120"/>
               </a:rPr>
-              <a:t>리소스 변경·자동 조치·코드 배포 기능은 아키텍처 결정 기록(ADR)으로 동결. 해제는 문서 수정이 아니라 별도 승인 절차가 필요한 제품 결정 — '실수로 켜지는' 경로 자체가 없음</a:t>
+              <a:t>변경·자동 조치·코드 배포 기능은 아키텍처 결정 기록(ADR)으로 동결 — 해제는 별도 승인 절차가 필요한 제품 결정. 단일 문서화 예외(ADR-015): 시크릿 회전 시 자기 웹 서비스 재시작(기본 꺼짐, IAM 1개 ARN 한정)</a:t>
             </a:r>
             <a:endParaRPr lang="en-US" sz="950" dirty="0"/>
           </a:p>
@@ -9805,7 +9805,7 @@
                 <a:ea typeface="Pretendard" pitchFamily="34" charset="-122"/>
                 <a:cs typeface="Pretendard" pitchFamily="34" charset="-120"/>
               </a:rPr>
-              <a:t>모니터링 대상 계정에는 ReadOnly 역할 하나만 요구. ExternalId로 혼동 대리인 차단, 등록 시점에 실제 assume 검증 통과해야 연결</a:t>
+              <a:t>모니터링 대상 계정에는 ReadOnly 역할 하나만 요구. 3rd-party 연결은 ExternalId 필수로 혼동 대리인 차단(1st-party는 역할 ARN 고정 시 선택), 등록 시점에 실제 assume 검증 통과해야 연결</a:t>
             </a:r>
             <a:endParaRPr lang="en-US" sz="950" dirty="0"/>
           </a:p>
@@ -10067,7 +10067,7 @@
                 <a:ea typeface="Pretendard" pitchFamily="34" charset="-122"/>
                 <a:cs typeface="Pretendard" pitchFamily="34" charset="-120"/>
               </a:rPr>
-              <a:t>0</a:t>
+              <a:t>1</a:t>
             </a:r>
             <a:endParaRPr lang="en-US" sz="1600" dirty="0"/>
           </a:p>
@@ -10106,7 +10106,7 @@
                 <a:ea typeface="Pretendard" pitchFamily="34" charset="-122"/>
                 <a:cs typeface="Pretendard" pitchFamily="34" charset="-120"/>
               </a:rPr>
-              <a:t>리소스 변경 API 호출</a:t>
+              <a:t>문서화된 예외 — 자기 웹 재시작 (ADR-015 · 기본 off)</a:t>
             </a:r>
             <a:endParaRPr lang="en-US" sz="750" dirty="0"/>
           </a:p>
@@ -13457,7 +13457,7 @@
                 <a:ea typeface="Pretendard" pitchFamily="34" charset="-122"/>
                 <a:cs typeface="Pretendard" pitchFamily="34" charset="-120"/>
               </a:rPr>
-              <a:t>6기둥 건강 점수·심각도·공수·절감액을 담은 15섹션 AI 진단 리포트</a:t>
+              <a:t>6기둥 건강 점수·심각도·공수·절감액을 담은 15+1섹션 AI 진단 리포트</a:t>
             </a:r>
             <a:endParaRPr lang="en-US" sz="1200" dirty="0"/>
           </a:p>
@@ -13643,7 +13643,7 @@
                 <a:ea typeface="Pretendard" pitchFamily="34" charset="-122"/>
                 <a:cs typeface="Pretendard" pitchFamily="34" charset="-120"/>
               </a:rPr>
-              <a:t>• 이전 리포트 대비 ▲악화 / ▼해소 추적</a:t>
+              <a:t>• 이전 리포트 대비 변화 추적 — 의도 대비 실제(intended-vs-actual) 위반 중심</a:t>
             </a:r>
             <a:endParaRPr lang="en-US" sz="1000" dirty="0"/>
           </a:p>
@@ -13769,7 +13769,7 @@
                 <a:ea typeface="Pretendard" pitchFamily="34" charset="-122"/>
                 <a:cs typeface="Pretendard" pitchFamily="34" charset="-120"/>
               </a:rPr>
-              <a:t>• 티어 선택: Light / Mid / Deep(15섹션) + 모델 선택(표준·상위)</a:t>
+              <a:t>• 티어 선택: Light / Mid / Deep(15+1섹션) + 모델 선택(표준·상위)</a:t>
             </a:r>
             <a:endParaRPr lang="en-US" sz="1000" dirty="0"/>
           </a:p>
@@ -13966,7 +13966,7 @@
                 <a:ea typeface="Pretendard" pitchFamily="34" charset="-122"/>
                 <a:cs typeface="Pretendard" pitchFamily="34" charset="-120"/>
               </a:rPr>
-              <a:t>15</a:t>
+              <a:t>15+1</a:t>
             </a:r>
             <a:endParaRPr lang="en-US" sz="1600" dirty="0"/>
           </a:p>
@@ -14005,7 +14005,7 @@
                 <a:ea typeface="Pretendard" pitchFamily="34" charset="-122"/>
                 <a:cs typeface="Pretendard" pitchFamily="34" charset="-120"/>
               </a:rPr>
-              <a:t>Deep 티어 분석 섹션 수</a:t>
+              <a:t>Deep 분석 섹션 (의도 대비 실제 포함)</a:t>
             </a:r>
             <a:endParaRPr lang="en-US" sz="750" dirty="0"/>
           </a:p>
@@ -14044,7 +14044,7 @@
                 <a:ea typeface="Pretendard" pitchFamily="34" charset="-122"/>
                 <a:cs typeface="Pretendard" pitchFamily="34" charset="-120"/>
               </a:rPr>
-              <a:t>▲ / ▼</a:t>
+              <a:t>diff</a:t>
             </a:r>
             <a:endParaRPr lang="en-US" sz="1600" dirty="0"/>
           </a:p>
@@ -14083,7 +14083,7 @@
                 <a:ea typeface="Pretendard" pitchFamily="34" charset="-122"/>
                 <a:cs typeface="Pretendard" pitchFamily="34" charset="-120"/>
               </a:rPr>
-              <a:t>이전 리포트 대비 악화·해소 추적</a:t>
+              <a:t>리포트 간 변화 추적 (위반 중심)</a:t>
             </a:r>
             <a:endParaRPr lang="en-US" sz="750" dirty="0"/>
           </a:p>
@@ -16082,7 +16082,7 @@
                 <a:ea typeface="Pretendard" pitchFamily="34" charset="-122"/>
                 <a:cs typeface="Pretendard" pitchFamily="34" charset="-120"/>
               </a:rPr>
-              <a:t>건강 점수 + 악화/해소 diff + PDF 내보내기 + 라이브 실행(진행 패널)</a:t>
+              <a:t>건강 점수 + 리포트 간 변화 + PDF 내보내기 + 라이브 실행(진행 패널)</a:t>
             </a:r>
             <a:endParaRPr lang="en-US" sz="950" dirty="0"/>
           </a:p>
@@ -16912,7 +16912,7 @@
                 <a:ea typeface="Pretendard" pitchFamily="34" charset="-122"/>
                 <a:cs typeface="Pretendard" pitchFamily="34" charset="-120"/>
               </a:rPr>
-              <a:t>읽기 전용 역할 하나입니다. ExternalId로 혼동 대리인을 차단하고, 등록 시점에 실제 assume 검증을 통과해야 연결됩니다. 쓰기 권한은 요구하지도, 받지도 않습니다.</a:t>
+              <a:t>읽기 전용 역할 하나입니다. 3rd-party 연결에는 ExternalId로 혼동 대리인을 차단하고, 등록 시점에 실제 assume 검증을 통과해야 연결됩니다. 쓰기 권한은 요구하지도, 받지도 않습니다.</a:t>
             </a:r>
             <a:endParaRPr lang="en-US" sz="950" dirty="0"/>
           </a:p>
@@ -21208,7 +21208,7 @@
                 <a:ea typeface="Pretendard" pitchFamily="34" charset="-122"/>
                 <a:cs typeface="Pretendard" pitchFamily="34" charset="-120"/>
               </a:rPr>
-              <a:t>리소스 변경·자동 조치 기능은 코드 레벨에서 동결. K8s는 GET만, 계정 연결은 ReadOnly 역할 하나 — 안심하고 전 계정을 연결하는 근거</a:t>
+              <a:t>모니터링 대상 계정은 읽기 전용으로만 조회. 변경·자동 조치는 거버넌스로 동결(단일 문서화 예외: 자기 웹 재시작, 기본 꺼짐). K8s는 GET만 — 안심하고 전 계정을 연결하는 근거</a:t>
             </a:r>
             <a:endParaRPr lang="en-US" sz="950" dirty="0"/>
           </a:p>
@@ -21481,7 +21481,7 @@
                 <a:ea typeface="Pretendard" pitchFamily="34" charset="-122"/>
                 <a:cs typeface="Pretendard" pitchFamily="34" charset="-120"/>
               </a:rPr>
-              <a:t>100%</a:t>
+              <a:t>read-only</a:t>
             </a:r>
             <a:endParaRPr lang="en-US" sz="1600" dirty="0"/>
           </a:p>
@@ -21520,7 +21520,7 @@
                 <a:ea typeface="Pretendard" pitchFamily="34" charset="-122"/>
                 <a:cs typeface="Pretendard" pitchFamily="34" charset="-120"/>
               </a:rPr>
-              <a:t>읽기 전용 — 쓰기 API 0건</a:t>
+              <a:t>모니터링 대상 계정 조회 원칙</a:t>
             </a:r>
             <a:endParaRPr lang="en-US" sz="750" dirty="0"/>
           </a:p>

--- a/docs-site/static/presentation/awsops-intro/awsops-intro.pptx
+++ b/docs-site/static/presentation/awsops-intro/awsops-intro.pptx
@@ -721,7 +721,7 @@
 • 공개 진입점 0 — CloudFront VPC Origin 전용 경로
 • 인증은 엣지에서 종료(RS256 JWKS + PKCE)
 • Aurora KMS 암호화 + 관리형 시크릿
-보안 담당자분들이 가장 먼저 물어보시는 부분입니다. AWSops에는 인터넷에 노출된 로드밸런서가 아예 없습니다. 유일한 진입점은 CloudFront이고, 거기서 VPC Origin이라는 비공개 통로로만 내부 ALB에 도달합니다. 내부 ALB의 보안 그룹도 CloudFront 관리형 그룹에서 오는 443만 허용합니다. 인증은 엣지에서 끝납니다 — Lambda@Edge가 모든 요청의 토큰 서명을 RS256으로 검증하고, 실패하면 오리진에 닿기 전에 로그인 페이지로 돌려보냅니다. 로그인은 Cognito 기반 PKCE 공개 클라이언트라 클라이언트 시크릿 자체가 없고, 저장 데이터는 KMS로 암호화됩니다. 운영 데이터를 다루는 도구이기 때문에, 진입 구조부터 폐쇄형으로 설계했습니다.
+보안 담당자분들이 가장 먼저 물어보시는 부분입니다. AWSops에는 인터넷에 노출된 로드밸런서가 아예 없습니다. 유일한 진입점은 CloudFront이고, 거기서 VPC Origin이라는 비공개 통로로만 내부 ALB에 도달합니다. 내부 ALB의 보안 그룹도 CloudFront 관리형 그룹에서 오는 443만 허용합니다. 인증은 엣지에서 끝납니다 — 앱 경로 요청의 토큰 서명을 Lambda@Edge가 RS256으로 검증하고, 실패하면 오리진에 닿기 전에 로그인 페이지로 돌려보냅니다. 로그인은 자체 /login 폼에서 Cognito로 인증하는 방식이고(클라이언트 시크릿 없음, Hosted UI PKCE는 폴백), 저장 데이터는 KMS로 암호화됩니다. 운영 데이터를 다루는 도구이기 때문에, 진입 구조부터 폐쇄형으로 설계했습니다.
 [약어]
 • PKCE(Proof Key for Code Exchange): 시크릿 없는 공개 클라이언트를 위한 OAuth 확장
 • JWKS(JSON Web Key Set): 토큰 서명 검증용 공개키 집합
@@ -819,9 +819,9 @@
               <a:rPr lang="en-US" dirty="0"/>
               <a:t>[요약]
 • 도메인별 게이트웨이 9종이 각자 전문 도구로 라이브 조회
-• 챗 16섹션 = 게이트웨이 9 + aws-data + 콜렉터 6
-• 자연어→SQL은 SELECT-only 가드로 안전하게 실행
-AI 레이어의 핵심은 '분업'입니다. 범용 챗봇 하나가 모든 질문을 받는 게 아니라, 네트워크·컨테이너·데이터·보안·비용·모니터링·IaC·운영·외부관측 아홉 개 도메인 게이트웨이가 각자 전문 도구를 들고 있습니다. 질문이 오면 해당 도메인 에이전트가 라이브 AWS 데이터를 직접 조회해서 답합니다. 여기에 두 가지가 더 있습니다. aws-data는 리소스 수량·목록 질문을 받는 generic 섹션이고 — 라이브 AWS 조회는 어디까지나 AgentCore 게이트웨이 경유가 원칙입니다. 그리고 유휴 리소스 스캔이나 인시던트 분석 같은 여섯 개 콜렉터는 근거 데이터를 자동으로 수집한 뒤 분석을 시작합니다. 합쳐서 16개 섹션 구성입니다. 모델은 Bedrock의 Claude 계열을 용도별로 혼용합니다.
+• 챗 16섹션 정의 = 게이트웨이 9 + aws-data + 전문 섹션 6 (활성화는 게이트 의존)
+• 라이브 AWS 조회는 AgentCore 게이트웨이 경유 원칙
+AI 레이어의 핵심은 '분업'입니다. 범용 챗봇 하나가 모든 질문을 받는 게 아니라, 네트워크·컨테이너·데이터·보안·비용·모니터링·IaC·운영·외부관측 아홉 개 도메인 게이트웨이가 각자 전문 도구를 들고 있습니다. 질문이 오면 해당 도메인 에이전트가 라이브 AWS 데이터를 직접 조회해서 답합니다. 여기에 두 가지가 더 있습니다. aws-data는 리소스 수량·목록 질문을 받는 generic 섹션이고 — 라이브 AWS 조회는 어디까지나 AgentCore 게이트웨이 경유가 원칙입니다. 그리고 유휴 리소스 스캔이나 인시던트 분석 같은 여섯 개 전문 섹션은 근거 데이터를 먼저 모으고 분석하는 자동 수집형 설계입니다 — 이들의 활성화는 인벤토리 게이트 설정에 의존합니다. 합쳐서 16개 섹션 정의입니다. 모델은 Bedrock의 Claude 계열을 용도별로 혼용합니다.
 [약어]
 • MCP(Model Context Protocol): AI 에이전트가 도구를 호출하는 표준 프로토콜
 • MSK(Managed Streaming for Apache Kafka): AWS 관리형 Kafka 서비스
@@ -1017,9 +1017,9 @@
               <a:rPr lang="en-US" dirty="0"/>
               <a:t>[요약]
 • 변경 기능은 거버넌스(ADR)로 동결 — 실수로 켤 수 없음
-• K8s GET-only · 계정 연결은 ReadOnly 역할 1개 + 검증
+• K8s 읽기 verb 한정 · 계정 연결은 ReadOnly 역할 1개 + 검증
 • AI 오답의 최악 = 틀린 조언 (틀린 변경이 아님)
-실무자 여러분께 가장 중요한 슬라이드입니다. AWSops에 변경 기능이 '없는' 것은 미완성이 아니라 설계 결정입니다. 자동 변경은 두 번째 장애의 가장 흔한 원인이고, 운영자가 도구를 신뢰하지 못하면 결국 쓰지 않게 됩니다. 그래서 변경·자동 조치 기능은 아키텍처 결정 기록으로 동결되어 있고, 해제하려면 별도 승인 절차가 필요합니다. 쿠버네티스에는 GET만 발행하고, 계정 연결에 요구하는 것도 읽기 전용 역할 하나뿐입니다. 유일한 문서화된 예외는 ADR-015 — 데이터베이스 시크릿 회전 때 자기 자신의 웹 서비스를 재시작하는 것 하나이며, 기본 꺼짐에 IAM도 해당 서비스 ARN 하나로 한정됩니다. 등록 시점에 실제로 역할을 assume해 봐서 성공해야만 연결됩니다. 이 원칙 덕분에 AI가 틀려도 최악의 경우가 '틀린 조언'입니다 — 인프라에는 아무 일도 일어나지 않습니다. 변경은 사람과 기존 IaC 파이프라인의 몫으로 남기고, AWSops는 판단 근거를 극단적으로 잘 만드는 데 집중합니다.
+실무자 여러분께 가장 중요한 슬라이드입니다. AWSops에 변경 기능이 '없는' 것은 미완성이 아니라 설계 결정입니다. 자동 변경은 두 번째 장애의 가장 흔한 원인이고, 운영자가 도구를 신뢰하지 못하면 결국 쓰지 않게 됩니다. 그래서 변경·자동 조치 기능은 아키텍처 결정 기록으로 동결되어 있고, 해제하려면 별도 승인 절차가 필요합니다. 쿠버네티스에는 읽기 verb만 발행하고 — 온보딩 때 opt-in으로 Access Entry에 AWS 관리형 read-only 정책을 부여하는 것이 유일한 설정 변경이며 워크로드 오브젝트는 건드리지 않습니다 — 계정 연결에 요구하는 것도 읽기 전용 역할 하나뿐입니다. 유일한 문서화된 예외는 ADR-015 — 데이터베이스 시크릿 회전 때 자기 자신의 웹 서비스를 재시작하는 것 하나이며, 기본 꺼짐에 IAM도 해당 서비스 ARN 하나로 한정됩니다. 등록 시점에 실제로 역할을 assume해 봐서 성공해야만 연결됩니다. 이 원칙 덕분에 AI가 틀려도 최악의 경우가 '틀린 조언'입니다 — 인프라에는 아무 일도 일어나지 않습니다. 변경은 사람과 기존 IaC 파이프라인의 몫으로 남기고, AWSops는 판단 근거를 극단적으로 잘 만드는 데 집중합니다.
 [약어]
 • ADR(Architecture Decision Record): 아키텍처 결정과 근거를 남기는 공식 기록
 [출처]
@@ -1401,7 +1401,7 @@
 • 페인 '비용 불명'에 대한 답 — 감지→지목→원인→절감 4단계
 • usage-type까지 내려가는 드릴다운
 • EKS는 OpenCost로 파드 단위 비용 + 전송량 과금 추정
-세 번째 가치, 비용입니다. 청구서는 결과만 말하지만, AWSops의 동선은 원인까지 네 걸음입니다. 먼저 전월 대비 배지가 급증을 포착하고, 서비스별 변화율 정렬로 무엇이 올랐는지 지목하고, 행을 클릭하면 그 서비스의 어떤 사용 유형이 올랐는지까지 내려갑니다. 마지막으로 AI 유휴 스캔이 gp2에서 gp3 전환 같은 절감 대상을 금액 추정과 함께 목록으로 만들어 줍니다. 원인 파악에서 절감 실행 목록까지 한 흐름입니다. 쿠버네티스도 예외가 아닙니다 — OpenCost 기반으로 파드 단위 비용을 분해하고, 파드별 네트워크 전송량에 과금 추정까지 붙입니다. 데모 시나리오 2번에서 실제 데이터로 보여드리겠습니다.
+세 번째 가치, 비용입니다. 청구서는 결과만 말하지만, AWSops의 동선은 원인까지 네 걸음입니다. 먼저 전월 대비 배지가 급증을 포착하고, 서비스별 변화율 정렬로 무엇이 올랐는지 지목하고, 행을 클릭하면 그 서비스의 어떤 사용 유형이 올랐는지까지 내려갑니다. 마지막으로 AI 비용 섹션에 물으면 gp2에서 gp3 전환 같은 절감 후보를 금액 추정과 함께 서술해 줍니다. 원인 파악에서 절감 실행 목록까지 한 흐름입니다. 쿠버네티스도 예외가 아닙니다 — OpenCost 기반으로 파드 단위 비용을 분해하고, 파드별 네트워크 전송량에 과금 추정까지 붙입니다. 데모 시나리오 2번에서 실제 데이터로 보여드리겠습니다.
 [약어]
 • MoM(Month over Month): 전월 대비 증감률
 • OpenCost: 쿠버네티스 비용 배분 오픈소스 표준
@@ -1497,8 +1497,8 @@
               <a:t>[요약]
 • 페인 4개의 총결산 — WA 6기둥 자동 채점 리포트
 • 발견 = 심각도 + 우선순위 + 공수 + 근거 + 절감액
-• 매주 자동 실행 + 리포트 간 변화 추적
-네 번째 가치는 Well-Architected 자동 진단입니다. 파트너 리뷰의 문제는 리뷰가 끝난 지 석 달이면 문서가 낡는다는 것입니다. AWSops는 같은 6기둥 채점을 매주 자동으로 돌립니다. 리포트 첫 장에는 0에서 100 사이의 인프라 건강 점수가 나오는데, 신호가 없는 기둥은 점수를 지어내지 않고 '데이터 부족'으로 명시합니다 — 날조하지 않는 것이 원칙입니다. 모든 발견에는 심각도, 우선순위, 공수, 근거가 붙어서 그대로 백로그에 넣을 수 있고, 비용 관련 발견에는 절감액 추정이 첨부됩니다. 이전 리포트 대비 변화 — 특히 의도 대비 실제 위반 — 가 추적되므로, 일회성 컨설팅이 아니라 상시 건강 관리가 됩니다. PDF로 내보내면 그대로 경영 보고서입니다. 데모 마지막에 실제 리포트를 보여드리겠습니다.
+• 자동 예약 실행 지원(활성화 시) + 리포트 간 변화 추적
+네 번째 가치는 Well-Architected 자동 진단입니다. 파트너 리뷰의 문제는 리뷰가 끝난 지 석 달이면 문서가 낡는다는 것입니다. AWSops는 같은 6기둥 채점을 자동 반복으로 — 예약을 켜면 매주·격주·매월 — 돌릴 수 있습니다. 리포트 첫 장에는 0에서 100 사이의 인프라 건강 점수가 나오는데, 신호가 없는 기둥은 점수를 지어내지 않고 '데이터 부족'으로 명시합니다 — 날조하지 않는 것이 원칙입니다. 모든 발견에는 심각도, 우선순위, 공수, 근거가 붙어서 그대로 백로그에 넣을 수 있고, 비용 관련 발견에는 절감액 추정이 첨부됩니다. 이전 리포트 대비 변화 — 특히 의도 대비 실제 위반 — 가 추적되므로, 일회성 컨설팅이 아니라 상시 건강 관리가 됩니다. PDF로 내보내면 그대로 경영 보고서입니다. 데모 마지막에 실제 리포트를 보여드리겠습니다.
 [약어]
 • WA(Well-Architected): AWS 6기둥 아키텍처 모범사례 프레임워크
 [출처]
@@ -5926,7 +5926,7 @@
                 <a:ea typeface="Pretendard" pitchFamily="34" charset="-122"/>
                 <a:cs typeface="Pretendard" pitchFamily="34" charset="-120"/>
               </a:rPr>
-              <a:t>모든 요청은 Lambda@Edge가 RS256 서명·발급자·만료를 검증. 통과 못 하면 오리진에 닿기도 전에 로그인으로 회송 — 대시보드 서버는 인증된 트래픽만 봄</a:t>
+              <a:t>앱 경로 요청은 Lambda@Edge가 RS256 서명·발급자·만료를 검증(정적 자산·health 등 소수 경로 제외). 통과 못 하면 오리진에 닿기 전에 로그인으로 회송</a:t>
             </a:r>
             <a:endParaRPr lang="en-US" sz="1100" dirty="0"/>
           </a:p>
@@ -5968,7 +5968,7 @@
                 <a:ea typeface="Pretendard" pitchFamily="34" charset="-122"/>
                 <a:cs typeface="Pretendard" pitchFamily="34" charset="-120"/>
               </a:rPr>
-              <a:t>표준 기반 로그인 — </a:t>
+              <a:t>자체 /login 폼 로그인 — </a:t>
             </a:r>
             <a:pPr indent="0" marL="0">
               <a:lnSpc>
@@ -5985,7 +5985,7 @@
                 <a:ea typeface="Pretendard" pitchFamily="34" charset="-122"/>
                 <a:cs typeface="Pretendard" pitchFamily="34" charset="-120"/>
               </a:rPr>
-              <a:t>Cognito User Pool + PKCE 공개 클라이언트(시크릿 없음). 세션 토큰 12시간, 서명 검증은 JWKS 공개키 기반</a:t>
+              <a:t>자체 로그인 폼 → Cognito 인증으로 세션 토큰 발급(12시간). 클라이언트 시크릿 없는 공개 클라이언트, Hosted UI PKCE는 폴백으로 보존. 서명 검증은 JWKS 공개키 기반</a:t>
             </a:r>
             <a:endParaRPr lang="en-US" sz="1100" dirty="0"/>
           </a:p>
@@ -7513,7 +7513,7 @@
                 <a:ea typeface="Pretendard" pitchFamily="34" charset="-122"/>
                 <a:cs typeface="Pretendard" pitchFamily="34" charset="-120"/>
               </a:rPr>
-              <a:t>자동 수집 콜렉터 6종</a:t>
+              <a:t>전문 섹션 6종 (자동 수집형 설계)</a:t>
             </a:r>
             <a:endParaRPr lang="en-US" sz="1200" dirty="0"/>
           </a:p>
@@ -7555,7 +7555,7 @@
                 <a:ea typeface="Pretendard" pitchFamily="34" charset="-122"/>
                 <a:cs typeface="Pretendard" pitchFamily="34" charset="-120"/>
               </a:rPr>
-              <a:t>유휴 리소스 스캔 · EKS/DB/MSK 최적화 · 지연 분석 · 인시던트 — 근거 데이터를 자동 수집한 뒤 분석. 총 16개 챗 섹션 구성</a:t>
+              <a:t>유휴 리소스 스캔 · EKS/DB/MSK 최적화 · 지연 분석 · 인시던트 — 근거 데이터를 먼저 모으고 분석하는 설계. 활성화는 인벤토리 게이트 의존, 총 16개 챗 섹션 구성</a:t>
             </a:r>
             <a:endParaRPr lang="en-US" sz="950" dirty="0"/>
           </a:p>
@@ -9427,7 +9427,7 @@
                 <a:ea typeface="Pretendard" pitchFamily="34" charset="-122"/>
                 <a:cs typeface="Pretendard" pitchFamily="34" charset="-120"/>
               </a:rPr>
-              <a:t>변경 기능 코드 동결 + K8s GET-only + 계정당 ReadOnly 역할 1개의 안전 설계</a:t>
+              <a:t>변경 기능 코드 동결 + K8s 읽기 verb 한정 + 계정당 ReadOnly 역할 1개의 안전 설계</a:t>
             </a:r>
             <a:endParaRPr lang="en-US" sz="1200" dirty="0"/>
           </a:p>
@@ -9637,7 +9637,7 @@
                 <a:ea typeface="Pretendard" pitchFamily="34" charset="-122"/>
                 <a:cs typeface="Pretendard" pitchFamily="34" charset="-120"/>
               </a:rPr>
-              <a:t>K8s는 GET만</a:t>
+              <a:t>K8s는 읽기 verb만</a:t>
             </a:r>
             <a:endParaRPr lang="en-US" sz="1250" dirty="0"/>
           </a:p>
@@ -9679,7 +9679,7 @@
                 <a:ea typeface="Pretendard" pitchFamily="34" charset="-122"/>
                 <a:cs typeface="Pretendard" pitchFamily="34" charset="-120"/>
               </a:rPr>
-              <a:t>EKS 클러스터 조회는 읽기 verb만 발행. 조회 등록도 클러스터 쪽 변경 없이 Access Entry 기반 — 운영 클러스터에 손대지 않음</a:t>
+              <a:t>런타임 조회는 read-only verb(get·list·watch)만 발행 + BFF kind 허용목록으로 추가 제한. 온보딩은 opt-in Access Entry + AWS 관리형 read-only 정책 부여(제어부 권한 설정) — 워크로드 오브젝트는 변경하지 않음</a:t>
             </a:r>
             <a:endParaRPr lang="en-US" sz="950" dirty="0"/>
           </a:p>
@@ -9989,7 +9989,7 @@
                 <a:ea typeface="Pretendard" pitchFamily="34" charset="-122"/>
                 <a:cs typeface="Pretendard" pitchFamily="34" charset="-120"/>
               </a:rPr>
-              <a:t>GET</a:t>
+              <a:t>get·list·watch</a:t>
             </a:r>
             <a:endParaRPr lang="en-US" sz="1600" dirty="0"/>
           </a:p>
@@ -10028,7 +10028,7 @@
                 <a:ea typeface="Pretendard" pitchFamily="34" charset="-122"/>
                 <a:cs typeface="Pretendard" pitchFamily="34" charset="-120"/>
               </a:rPr>
-              <a:t>K8s에 발행하는 유일한 verb</a:t>
+              <a:t>K8s에 발행하는 읽기 verb (BFF kind 허용목록)</a:t>
             </a:r>
             <a:endParaRPr lang="en-US" sz="750" dirty="0"/>
           </a:p>
@@ -10145,7 +10145,7 @@
                 <a:ea typeface="Pretendard" pitchFamily="34" charset="-122"/>
                 <a:cs typeface="Pretendard" pitchFamily="34" charset="-120"/>
               </a:rPr>
-              <a:t>100%</a:t>
+              <a:t>근거 필수</a:t>
             </a:r>
             <a:endParaRPr lang="en-US" sz="1600" dirty="0"/>
           </a:p>
@@ -10184,7 +10184,7 @@
                 <a:ea typeface="Pretendard" pitchFamily="34" charset="-122"/>
                 <a:cs typeface="Pretendard" pitchFamily="34" charset="-120"/>
               </a:rPr>
-              <a:t>AI 발견 항목의 근거(소스) 첨부율</a:t>
+              <a:t>발견마다 근거(소스) 첨부 — 프롬프트 강제 설계</a:t>
             </a:r>
             <a:endParaRPr lang="en-US" sz="750" dirty="0"/>
           </a:p>
@@ -10899,7 +10899,7 @@
                 <a:ea typeface="Pretendard" pitchFamily="34" charset="-122"/>
                 <a:cs typeface="Pretendard" pitchFamily="34" charset="-120"/>
               </a:rPr>
-              <a:t>• ClickHouse 트레이스가 서비스 맵(호출 그래프)을 채우고, Prometheus 메트릭이 AI 심층 진단의 근거로 흡수</a:t>
+              <a:t>• ClickHouse 트레이스가 서비스 맵(호출 그래프)을 채우고, Prometheus 메트릭이 AI 심층 진단의 근거로 흡수(진단 연동 활성화 시)</a:t>
             </a:r>
             <a:endParaRPr lang="en-US" sz="1000" dirty="0"/>
           </a:p>
@@ -12869,7 +12869,7 @@
                 <a:ea typeface="Pretendard" pitchFamily="34" charset="-122"/>
                 <a:cs typeface="Pretendard" pitchFamily="34" charset="-120"/>
               </a:rPr>
-              <a:t>AI Idle Scan이 절감액 추정 달린 목록 생성</a:t>
+              <a:t>AI 비용 섹션이 절감 후보를 금액 추정과 함께 서술</a:t>
             </a:r>
             <a:endParaRPr lang="en-US" sz="750" dirty="0"/>
           </a:p>
@@ -13418,7 +13418,7 @@
                 <a:ea typeface="Pretendard" pitchFamily="34" charset="-122"/>
                 <a:cs typeface="Pretendard" pitchFamily="34" charset="-120"/>
               </a:rPr>
-              <a:t>Well-Architected 리뷰를, 매주 자동으로</a:t>
+              <a:t>Well-Architected 리뷰를, 자동 반복으로</a:t>
             </a:r>
             <a:endParaRPr lang="en-US" sz="2600" dirty="0"/>
           </a:p>
@@ -13789,7 +13789,7 @@
                 <a:ea typeface="Pretendard" pitchFamily="34" charset="-122"/>
                 <a:cs typeface="Pretendard" pitchFamily="34" charset="-120"/>
               </a:rPr>
-              <a:t>• 매주·격주·매월 자동 예약 + 완료 시 이메일 딥링크</a:t>
+              <a:t>• 매주·격주·매월 자동 예약 지원(활성화 시) + 완료 시 이메일 딥링크</a:t>
             </a:r>
             <a:endParaRPr lang="en-US" sz="1000" dirty="0"/>
           </a:p>
@@ -15881,7 +15881,7 @@
                 <a:ea typeface="Pretendard" pitchFamily="34" charset="-122"/>
                 <a:cs typeface="Pretendard" pitchFamily="34" charset="-120"/>
               </a:rPr>
-              <a:t>MoM 감지 → 서비스 변화율 → usage-type 드릴다운 → Idle Scan 절감 목록</a:t>
+              <a:t>MoM 감지 → 서비스 변화율 → usage-type 드릴다운 → AI 비용 절감 분석</a:t>
             </a:r>
             <a:endParaRPr lang="en-US" sz="950" dirty="0"/>
           </a:p>
@@ -17041,7 +17041,7 @@
                 <a:ea typeface="Pretendard" pitchFamily="34" charset="-122"/>
                 <a:cs typeface="Pretendard" pitchFamily="34" charset="-120"/>
               </a:rPr>
-              <a:t>에이전트는 수집된 라이브 데이터에만 근거하고, 신호가 없으면 '데이터 불가'로 답하도록 강제됩니다. 모든 발견에 근거가 첨부되고 — 읽기 전용이라 최악의 경우가 '틀린 조언'입니다. Bedrock은 고객 데이터를 모델 학습에 쓰지 않습니다.</a:t>
+              <a:t>에이전트는 수집된 라이브 데이터에만 근거하고, 신호가 없으면 '데이터 불가'로 답하도록 설계되어 있습니다. 모든 발견에 근거가 첨부되고 — 읽기 전용이라 최악의 경우가 '틀린 조언'입니다. Bedrock은 고객 데이터를 모델 학습에 쓰지 않습니다.</a:t>
             </a:r>
             <a:endParaRPr lang="en-US" sz="950" dirty="0"/>
           </a:p>
@@ -21208,7 +21208,7 @@
                 <a:ea typeface="Pretendard" pitchFamily="34" charset="-122"/>
                 <a:cs typeface="Pretendard" pitchFamily="34" charset="-120"/>
               </a:rPr>
-              <a:t>모니터링 대상 계정은 읽기 전용으로만 조회. 변경·자동 조치는 거버넌스로 동결(단일 문서화 예외: 자기 웹 재시작, 기본 꺼짐). K8s는 GET만 — 안심하고 전 계정을 연결하는 근거</a:t>
+              <a:t>모니터링 대상 계정은 읽기 전용으로만 조회. 변경·자동 조치는 거버넌스로 동결(단일 문서화 예외: 자기 웹 재시작, 기본 꺼짐). K8s는 읽기 verb만 — 안심하고 전 계정을 연결하는 근거</a:t>
             </a:r>
             <a:endParaRPr lang="en-US" sz="950" dirty="0"/>
           </a:p>
@@ -21286,7 +21286,7 @@
                 <a:ea typeface="Pretendard" pitchFamily="34" charset="-122"/>
                 <a:cs typeface="Pretendard" pitchFamily="34" charset="-120"/>
               </a:rPr>
-              <a:t>AI 챗 섹션 키 (전부 활성)</a:t>
+              <a:t>AI 챗 섹션 키 (정의 기준 — 게이트/플래그 의존)</a:t>
             </a:r>
             <a:endParaRPr lang="en-US" sz="750" dirty="0"/>
           </a:p>

--- a/docs-site/static/presentation/awsops-intro/awsops-intro.pptx
+++ b/docs-site/static/presentation/awsops-intro/awsops-intro.pptx
@@ -727,7 +727,7 @@
 • JWKS(JSON Web Key Set): 토큰 서명 검증용 공개키 집합
 • CMK(Customer Managed Key): 고객 관리형 KMS 암호화 키
 [출처]
-• AWSops 인증 레퍼런스 — 리포지토리 docs/reference/02-auth.md
+• AWSops 결정 기준선 — 리포지토리 docs/decisions/BASELINE.md
 [변경 이력]
 • 2026-08-11: 초기 작성</a:t>
             </a:r>
@@ -826,7 +826,7 @@
 • MCP(Model Context Protocol): AI 에이전트가 도구를 호출하는 표준 프로토콜
 • MSK(Managed Streaming for Apache Kafka): AWS 관리형 Kafka 서비스
 [출처]
-• AWSops AgentCore 레퍼런스 — 리포지토리 docs/reference/05-agentcore.md
+• AWSops 결정 기준선 — 리포지토리 docs/decisions/BASELINE.md
 [변경 이력]
 • 2026-08-11: 초기 작성</a:t>
             </a:r>
@@ -1016,7 +1016,7 @@
             <a:r>
               <a:rPr lang="en-US" dirty="0"/>
               <a:t>[요약]
-• 변경 기능은 거버넌스(ADR)로 동결 — 실수로 켤 수 없음
+• 변경 기능은 거버넌스(ADR)로 동결 — 해제는 별도 승인 절차
 • K8s 읽기 verb 한정 · 계정 연결은 ReadOnly 역할 1개 + 검증
 • AI 오답의 최악 = 틀린 조언 (틀린 변경이 아님)
 실무자 여러분께 가장 중요한 슬라이드입니다. AWSops에 변경 기능이 '없는' 것은 미완성이 아니라 설계 결정입니다. 자동 변경은 두 번째 장애의 가장 흔한 원인이고, 운영자가 도구를 신뢰하지 못하면 결국 쓰지 않게 됩니다. 그래서 변경·자동 조치 기능은 아키텍처 결정 기록으로 동결되어 있고, 해제하려면 별도 승인 절차가 필요합니다. 쿠버네티스에는 읽기 verb만 발행하고 — 온보딩 때 opt-in으로 Access Entry에 AWS 관리형 read-only 정책을 부여하는 것이 유일한 설정 변경이며 워크로드 오브젝트는 건드리지 않습니다 — 계정 연결에 요구하는 것도 읽기 전용 역할 하나뿐입니다. 유일한 문서화된 예외는 ADR-015 — 데이터베이스 시크릿 회전 때 자기 자신의 웹 서비스를 재시작하는 것 하나이며, 기본 꺼짐에 IAM도 해당 서비스 ARN 하나로 한정됩니다. 등록 시점에 실제로 역할을 assume해 봐서 성공해야만 연결됩니다. 이 원칙 덕분에 AI가 틀려도 최악의 경우가 '틀린 조언'입니다 — 인프라에는 아무 일도 일어나지 않습니다. 변경은 사람과 기존 IaC 파이프라인의 몫으로 남기고, AWSops는 판단 근거를 극단적으로 잘 만드는 데 집중합니다.
@@ -5088,7 +5088,7 @@
                 <a:ea typeface="Pretendard" pitchFamily="34" charset="-122"/>
                 <a:cs typeface="Pretendard" pitchFamily="34" charset="-120"/>
               </a:rPr>
-              <a:t>IaC 100%</a:t>
+              <a:t>IaC</a:t>
             </a:r>
             <a:endParaRPr lang="en-US" sz="1600" dirty="0"/>
           </a:p>
@@ -5127,7 +5127,7 @@
                 <a:ea typeface="Pretendard" pitchFamily="34" charset="-122"/>
                 <a:cs typeface="Pretendard" pitchFamily="34" charset="-120"/>
               </a:rPr>
-              <a:t>Terraform 단일 루트 · 플래그 게이트</a:t>
+              <a:t>Terraform 단일 루트 + 멱등 프로비저너 · 플래그 게이트</a:t>
             </a:r>
             <a:endParaRPr lang="en-US" sz="750" dirty="0"/>
           </a:p>

--- a/docs-site/static/presentation/awsops-intro/awsops-intro.pptx
+++ b/docs-site/static/presentation/awsops-intro/awsops-intro.pptx
@@ -819,9 +819,9 @@
               <a:rPr lang="en-US" dirty="0"/>
               <a:t>[요약]
 • 도메인별 게이트웨이 9종이 각자 전문 도구로 라이브 조회
-• 챗 16섹션 정의 = 게이트웨이 9 + aws-data + 전문 섹션 6 (활성화는 게이트 의존)
+• 챗 16섹션 정의 = 게이트웨이 9 + aws-data + 전문 섹션 6 (로컬 7종은 현재 비활성 — 표준 라우팅 대응)
 • 라이브 AWS 조회는 AgentCore 게이트웨이 경유 원칙
-AI 레이어의 핵심은 '분업'입니다. 범용 챗봇 하나가 모든 질문을 받는 게 아니라, 네트워크·컨테이너·데이터·보안·비용·모니터링·IaC·운영·외부관측 아홉 개 도메인 게이트웨이가 각자 전문 도구를 들고 있습니다. 질문이 오면 해당 도메인 에이전트가 라이브 AWS 데이터를 직접 조회해서 답합니다. 여기에 두 가지가 더 있습니다. aws-data는 리소스 수량·목록 질문을 받는 generic 섹션이고 — 라이브 AWS 조회는 어디까지나 AgentCore 게이트웨이 경유가 원칙입니다. 그리고 유휴 리소스 스캔이나 인시던트 분석 같은 여섯 개 전문 섹션은 근거 데이터를 먼저 모으고 분석하는 자동 수집형 설계입니다 — 이들의 활성화는 인벤토리 게이트 설정에 의존합니다. 합쳐서 16개 섹션 정의입니다. 모델은 Bedrock의 Claude 계열을 용도별로 혼용합니다.
+AI 레이어의 핵심은 '분업'입니다. 범용 챗봇 하나가 모든 질문을 받는 게 아니라, 네트워크·컨테이너·데이터·보안·비용·모니터링·IaC·운영·외부관측 아홉 개 도메인 게이트웨이가 각자 전문 도구를 들고 있습니다. 질문이 오면 해당 도메인 에이전트가 라이브 AWS 데이터를 직접 조회해서 답합니다. 여기에 두 가지가 더 있습니다. aws-data는 리소스 수량·목록 질문을 받는 generic 섹션이고 — 라이브 AWS 조회는 어디까지나 AgentCore 게이트웨이 경유가 원칙입니다. 그리고 유휴 리소스 스캔이나 인시던트 분석 같은 여섯 개 전문 섹션은 근거 데이터를 먼저 모으고 분석하는 자동 수집형 설계입니다 — 이 경로는 현재 설계 원칙(ADR-001/010)에 따라 비활성이며 해당 질문은 표준 라우팅이 대응합니다. 합쳐서 16개 섹션 정의입니다. 모델은 Bedrock의 Claude 계열을 용도별로 혼용합니다.
 [약어]
 • MCP(Model Context Protocol): AI 에이전트가 도구를 호출하는 표준 프로토콜
 • MSK(Managed Streaming for Apache Kafka): AWS 관리형 Kafka 서비스
@@ -7555,7 +7555,7 @@
                 <a:ea typeface="Pretendard" pitchFamily="34" charset="-122"/>
                 <a:cs typeface="Pretendard" pitchFamily="34" charset="-120"/>
               </a:rPr>
-              <a:t>유휴 리소스 스캔 · EKS/DB/MSK 최적화 · 지연 분석 · 인시던트 — 근거 데이터를 먼저 모으고 분석하는 설계. 활성화는 인벤토리 게이트 의존, 총 16개 챗 섹션 구성</a:t>
+              <a:t>유휴 리소스 스캔 · EKS/DB/MSK 최적화 · 지연 분석 · 인시던트 — 근거 데이터를 먼저 모으고 분석하는 설계 — 현재는 설계 원칙(ADR-001/010)에 따라 비활성, 표준 라우팅으로 대응. 총 16개 챗 섹션 구성</a:t>
             </a:r>
             <a:endParaRPr lang="en-US" sz="950" dirty="0"/>
           </a:p>
@@ -10879,7 +10879,7 @@
                 <a:ea typeface="Pretendard" pitchFamily="34" charset="-122"/>
                 <a:cs typeface="Pretendard" pitchFamily="34" charset="-120"/>
               </a:rPr>
-              <a:t>• Prometheus · Mimir · Loki · Tempo · ClickHouse · Jaeger · Datadog · Dynatrace — 8종 read-only 데이터소스</a:t>
+              <a:t>• Prometheus · Mimir · Loki · Tempo · ClickHouse · Jaeger · Datadog · Dynatrace — 8종 read-only 등록 지원(라이브 라우팅은 Prometheus·ClickHouse 중심, 단계적 확대)</a:t>
             </a:r>
             <a:endParaRPr lang="en-US" sz="1000" dirty="0"/>
           </a:p>
@@ -11095,7 +11095,7 @@
                 <a:ea typeface="Pretendard" pitchFamily="34" charset="-122"/>
                 <a:cs typeface="Pretendard" pitchFamily="34" charset="-120"/>
               </a:rPr>
-              <a:t>외부 관측 데이터소스 커넥터</a:t>
+              <a:t>외부 관측 데이터소스 (등록 기준)</a:t>
             </a:r>
             <a:endParaRPr lang="en-US" sz="750" dirty="0"/>
           </a:p>
@@ -21442,7 +21442,7 @@
                 <a:ea typeface="Pretendard" pitchFamily="34" charset="-122"/>
                 <a:cs typeface="Pretendard" pitchFamily="34" charset="-120"/>
               </a:rPr>
-              <a:t>외부 관측 데이터소스 커넥터</a:t>
+              <a:t>외부 관측 데이터소스 (등록 기준)</a:t>
             </a:r>
             <a:endParaRPr lang="en-US" sz="750" dirty="0"/>
           </a:p>

--- a/docs-site/static/presentation/awsops-intro/awsops-intro.pptx
+++ b/docs-site/static/presentation/awsops-intro/awsops-intro.pptx
@@ -1304,7 +1304,7 @@
 • 페인 'RCA 지연'에 대한 답 — 좁히고, 확인하고, 종합
 • 토폴로지 포커스 모드 + NFM E2E 홉 경로가 하이라이트
 • AI가 알람·변경 이력을 자동 조합
-두 번째 가치, 장애 원인 추적입니다. 동선은 세 걸음입니다. 먼저 토폴로지에서 좁힙니다 — 요청 흐름 그래프에서 문제 노드를 클릭하면 연결된 경로만 남고, 로드밸런서 뒤의 IP가 아니라 실제 쿠버네티스 워크로드 이름이 보입니다. 다음으로 네트워크 플로우에서 확인합니다 — 라이브 쿼리로 트래픽 상위 기여자를 찾고, 행 하나를 클릭하면 파드에서 NAT 게이트웨이를 지나 원격지까지의 홉 경로가 한 화면에 그려집니다. 마지막으로 AI가 종합합니다 — 그래프에서 바로 질문을 던지면 해당 리소스 맥락을 물고 챗이 열리고, 인시던트 섹션은 알람과 변경 이력을 자동 수집해 원인 후보를 서술합니다. 사람이 하던 신호 조합을 AI가 대신하는 것입니다. 데모 시나리오 1번에서 이 동선을 그대로 보여드리겠습니다.
+두 번째 가치, 장애 원인 추적입니다. 동선은 세 걸음입니다. 먼저 토폴로지에서 좁힙니다 — 요청 흐름 그래프에서 문제 노드를 클릭하면 연결된 경로만 남고, 로드밸런서 뒤의 IP가 아니라 실제 쿠버네티스 워크로드 이름이 보입니다. 다음으로 네트워크 플로우에서 확인합니다 — 라이브 쿼리로 트래픽 상위 기여자를 찾고, 행 하나를 클릭하면 파드에서 NAT 게이트웨이를 지나 원격지까지의 홉 경로가 한 화면에 그려집니다. 마지막으로 AI가 종합합니다 — 그래프에서 바로 질문을 던지면 해당 리소스 맥락을 물고 챗이 열리고, 인시던트 질문에는 에이전트가 알람과 변경 이력을 조회해 원인 후보를 서술합니다. 사람이 하던 신호 조합을 AI가 대신하는 것입니다. 데모 시나리오 1번에서 이 동선을 그대로 보여드리겠습니다.
 [약어]
 • NFM(Network Flow Monitor): CloudWatch 기반 네트워크 플로우 관측 서비스
 • TGW(Transit Gateway): VPC 간 중계 허브 게이트웨이
@@ -2532,7 +2532,7 @@
               <a:t>[요약]
 • 12개 상단 메뉴 — 운영 동선(현황→진단→조치 근거) 순서
 • 네트워크 5종 메뉴 · EKS 7탭 드릴다운 포함
-• Cmd-K 팔레트로 모든 페이지·리소스 즉시 검색
+• Cmd-K 팔레트로 페이지·리소스 유형 즉시 이동
 전체 기능을 메뉴 단위로 보면 이렇습니다. 왼쪽 위부터 — 접속하면 개요 대시보드에서 AI 인사이트와 보안 이슈, 비용 흐름을 한눈에 봅니다. 문제가 보이면 토폴로지와 네트워크 플로우로 내려가고, 비용이 이상하면 비용 메뉴에서 드릴다운합니다. 판단이 어려우면 어시스턴트에게 물어보고, 주기적인 건강 관리는 AI 진단 리포트가 담당합니다. EKS는 클러스터별 7개 탭으로 파드 단위까지 내려가고, 연동 메뉴에서 기존 관측 도구를 등록합니다. 중요한 것은 이 메뉴 순서가 실제 운영 동선이라는 점입니다 — 새벽에 여는 화면 순서 그대로입니다.
 [약어]
 • NFM(Network Flow Monitor): CloudWatch 기반 네트워크 플로우 관측 서비스
@@ -11817,7 +11817,7 @@
                 <a:ea typeface="Pretendard" pitchFamily="34" charset="-122"/>
                 <a:cs typeface="Pretendard" pitchFamily="34" charset="-120"/>
               </a:rPr>
-              <a:t>그래프에서 'AI에 질문'을 누르면 챗이 해당 리소스 컨텍스트를 물고 열림. 인시던트 섹션은 알람과 변경 이력을 자동 수집해 원인 후보를 서술 — 신호 조합을 AI가 대신</a:t>
+              <a:t>그래프에서 'AI에 질문'을 누르면 챗이 해당 리소스 컨텍스트를 물고 열림. 인시던트 질문에는 에이전트가 알람·변경 이력을 라이브 조회해 원인 후보를 서술 — 신호 조합을 AI가 대신</a:t>
             </a:r>
             <a:endParaRPr lang="en-US" sz="950" dirty="0"/>
           </a:p>
@@ -16912,7 +16912,7 @@
                 <a:ea typeface="Pretendard" pitchFamily="34" charset="-122"/>
                 <a:cs typeface="Pretendard" pitchFamily="34" charset="-120"/>
               </a:rPr>
-              <a:t>읽기 전용 역할 하나입니다. 3rd-party 연결에는 ExternalId로 혼동 대리인을 차단하고, 등록 시점에 실제 assume 검증을 통과해야 연결됩니다. 쓰기 권한은 요구하지도, 받지도 않습니다.</a:t>
+              <a:t>읽기 전용 역할 하나입니다. 3rd-party 연결에는 ExternalId로 혼동 대리인을 차단하고, 등록 시점에 실제 assume 검증을 통과해야 연결됩니다. 모니터링 대상 계정에는 쓰기 권한을 요구하지도, 받지도 않습니다(호스트 자신에 대한 단일 문서화 예외는 ADR-015 웹 재시작뿐).</a:t>
             </a:r>
             <a:endParaRPr lang="en-US" sz="950" dirty="0"/>
           </a:p>
@@ -23496,7 +23496,7 @@
                 <a:ea typeface="Pretendard" pitchFamily="34" charset="-122"/>
                 <a:cs typeface="Pretendard" pitchFamily="34" charset="-120"/>
               </a:rPr>
-              <a:t>전 페이지·리소스 즉시 검색 팔레트</a:t>
+              <a:t>페이지·리소스 유형 즉시 이동 팔레트</a:t>
             </a:r>
             <a:endParaRPr lang="en-US" sz="750" dirty="0"/>
           </a:p>

--- a/docs-site/static/presentation/awsops-intro/awsops-intro.pptx
+++ b/docs-site/static/presentation/awsops-intro/awsops-intro.pptx
@@ -2154,7 +2154,7 @@
 • 장애 대응 시간의 대부분은 진단이 아닌 화면 이동
 • 신호는 도구마다 있지만 조합하는 상황판이 부재
 • MTTR 단축의 열쇠 = 이동 시간 제거
-여기서 본인의 실제 장애 경험담을 넣어 주십시오 — 날짜와 서비스명이 구체적일수록 좋습니다. 새벽에 알람을 받고, CloudWatch에서 시작해 EC2 콘솔, 로드밸런서 타깃 그룹, kubectl, Grafana, 비용 화면까지 여섯 개 화면을 오갑니다. 각 화면에는 신호가 다 있습니다. 문제는 그 신호를 조합하는 일이 전부 사람 머릿속에서 일어난다는 겁니다. 그래서 장애의 90%는 답이 어려운 게 아니라, 답이 있는 화면을 찾아가는 데 시간이 갑니다. MTTR의 대부분은 진단 시간이 아니라 이동 시간입니다. AWSops는 그날 제가 갖고 싶었던 화면을 만든 것입니다.
+새벽에 알람을 받고, CloudWatch에서 시작해 EC2 콘솔, 로드밸런서 타깃 그룹, kubectl, Grafana, 비용 화면까지 여섯 개 화면을 오갑니다. 각 화면에는 신호가 다 있습니다. 문제는 그 신호를 조합하는 일이 전부 사람 머릿속에서 일어난다는 겁니다. 그래서 장애의 90%는 답이 어려운 게 아니라, 답이 있는 화면을 찾아가는 데 시간이 갑니다. MTTR의 대부분은 진단 시간이 아니라 이동 시간입니다. AWSops는 그날 제가 갖고 싶었던 화면을 만든 것입니다.
 [약어]
 • MTTR(Mean Time To Recovery): 장애 발생부터 복구까지의 평균 소요 시간
 [변경 이력]

--- a/docs-site/static/presentation/awsops-intro/awsops-intro.pptx
+++ b/docs-site/static/presentation/awsops-intro/awsops-intro.pptx
@@ -3176,7 +3176,7 @@
       </p:sp>
       <p:pic>
         <p:nvPicPr>
-          <p:cNvPr id="5" name="Image 0" descr="/home/user/awsops/docs-site/scripts/pptx/assets/aws_logo.png">    </p:cNvPr>
+          <p:cNvPr id="5" name="Image 0" descr="AWS logo">    </p:cNvPr>
           <p:cNvPicPr>
             <a:picLocks noChangeAspect="1"/>
           </p:cNvPicPr>
@@ -5239,7 +5239,7 @@
       </p:sp>
       <p:pic>
         <p:nvPicPr>
-          <p:cNvPr id="59" name="Image 0" descr="/home/user/awsops/docs-site/scripts/pptx/assets/aws_logo.png">    </p:cNvPr>
+          <p:cNvPr id="59" name="Image 0" descr="AWS logo">    </p:cNvPr>
           <p:cNvPicPr>
             <a:picLocks noChangeAspect="1"/>
           </p:cNvPicPr>
@@ -6539,7 +6539,7 @@
       </p:sp>
       <p:pic>
         <p:nvPicPr>
-          <p:cNvPr id="35" name="Image 0" descr="/home/user/awsops/docs-site/scripts/pptx/assets/aws_logo.png">    </p:cNvPr>
+          <p:cNvPr id="35" name="Image 0" descr="AWS logo">    </p:cNvPr>
           <p:cNvPicPr>
             <a:picLocks noChangeAspect="1"/>
           </p:cNvPicPr>
@@ -7396,7 +7396,7 @@
       </p:sp>
       <p:pic>
         <p:nvPicPr>
-          <p:cNvPr id="25" name="Image 0" descr="/home/user/awsops/docs-site/scripts/pptx/assets/ai_agent.png">    </p:cNvPr>
+          <p:cNvPr id="25" name="Image 0" descr="ai_agent icon">    </p:cNvPr>
           <p:cNvPicPr>
             <a:picLocks noChangeAspect="1"/>
           </p:cNvPicPr>
@@ -7555,7 +7555,7 @@
       </p:sp>
       <p:pic>
         <p:nvPicPr>
-          <p:cNvPr id="30" name="Image 1" descr="/home/user/awsops/docs-site/scripts/pptx/assets/gateway.png">    </p:cNvPr>
+          <p:cNvPr id="30" name="Image 1" descr="gateway icon">    </p:cNvPr>
           <p:cNvPicPr>
             <a:picLocks noChangeAspect="1"/>
           </p:cNvPicPr>
@@ -7714,7 +7714,7 @@
       </p:sp>
       <p:pic>
         <p:nvPicPr>
-          <p:cNvPr id="35" name="Image 2" descr="/home/user/awsops/docs-site/scripts/pptx/assets/memory.png">    </p:cNvPr>
+          <p:cNvPr id="35" name="Image 2" descr="memory icon">    </p:cNvPr>
           <p:cNvPicPr>
             <a:picLocks noChangeAspect="1"/>
           </p:cNvPicPr>
@@ -8208,7 +8208,7 @@
       </p:sp>
       <p:pic>
         <p:nvPicPr>
-          <p:cNvPr id="48" name="Image 3" descr="/home/user/awsops/docs-site/scripts/pptx/assets/aws_logo.png">    </p:cNvPr>
+          <p:cNvPr id="48" name="Image 3" descr="AWS logo">    </p:cNvPr>
           <p:cNvPicPr>
             <a:picLocks noChangeAspect="1"/>
           </p:cNvPicPr>
@@ -9640,7 +9640,7 @@
       </p:sp>
       <p:pic>
         <p:nvPicPr>
-          <p:cNvPr id="39" name="Image 0" descr="/home/user/awsops/docs-site/scripts/pptx/assets/aws_logo.png">    </p:cNvPr>
+          <p:cNvPr id="39" name="Image 0" descr="AWS logo">    </p:cNvPr>
           <p:cNvPicPr>
             <a:picLocks noChangeAspect="1"/>
           </p:cNvPicPr>
@@ -10659,7 +10659,7 @@
       </p:sp>
       <p:pic>
         <p:nvPicPr>
-          <p:cNvPr id="28" name="Image 0" descr="/home/user/awsops/docs-site/scripts/pptx/assets/aws_logo.png">    </p:cNvPr>
+          <p:cNvPr id="28" name="Image 0" descr="AWS logo">    </p:cNvPr>
           <p:cNvPicPr>
             <a:picLocks noChangeAspect="1"/>
           </p:cNvPicPr>
@@ -10923,7 +10923,7 @@
       </p:sp>
       <p:pic>
         <p:nvPicPr>
-          <p:cNvPr id="6" name="Image 0" descr="/home/user/awsops/docs-site/scripts/pptx/assets/aws_logo_white.png">    </p:cNvPr>
+          <p:cNvPr id="6" name="Image 0" descr="AWS logo">    </p:cNvPr>
           <p:cNvPicPr>
             <a:picLocks noChangeAspect="1"/>
           </p:cNvPicPr>
@@ -11868,7 +11868,7 @@
       </p:sp>
       <p:pic>
         <p:nvPicPr>
-          <p:cNvPr id="22" name="Image 0" descr="/home/user/awsops/docs-site/scripts/pptx/assets/aws_logo.png">    </p:cNvPr>
+          <p:cNvPr id="22" name="Image 0" descr="AWS logo">    </p:cNvPr>
           <p:cNvPicPr>
             <a:picLocks noChangeAspect="1"/>
           </p:cNvPicPr>
@@ -12832,7 +12832,7 @@
       </p:sp>
       <p:pic>
         <p:nvPicPr>
-          <p:cNvPr id="26" name="Image 0" descr="/home/user/awsops/docs-site/scripts/pptx/assets/aws_logo.png">    </p:cNvPr>
+          <p:cNvPr id="26" name="Image 0" descr="AWS logo">    </p:cNvPr>
           <p:cNvPicPr>
             <a:picLocks noChangeAspect="1"/>
           </p:cNvPicPr>
@@ -13987,7 +13987,7 @@
       </p:sp>
       <p:pic>
         <p:nvPicPr>
-          <p:cNvPr id="31" name="Image 0" descr="/home/user/awsops/docs-site/scripts/pptx/assets/aws_logo.png">    </p:cNvPr>
+          <p:cNvPr id="31" name="Image 0" descr="AWS logo">    </p:cNvPr>
           <p:cNvPicPr>
             <a:picLocks noChangeAspect="1"/>
           </p:cNvPicPr>
@@ -14950,7 +14950,7 @@
       </p:sp>
       <p:pic>
         <p:nvPicPr>
-          <p:cNvPr id="22" name="Image 0" descr="/home/user/awsops/docs-site/scripts/pptx/assets/aws_logo.png">    </p:cNvPr>
+          <p:cNvPr id="22" name="Image 0" descr="AWS logo">    </p:cNvPr>
           <p:cNvPicPr>
             <a:picLocks noChangeAspect="1"/>
           </p:cNvPicPr>
@@ -15106,7 +15106,7 @@
       </p:sp>
       <p:pic>
         <p:nvPicPr>
-          <p:cNvPr id="4" name="Image 0" descr="/home/user/awsops/docs-site/scripts/pptx/assets/cloudwatch.png">    </p:cNvPr>
+          <p:cNvPr id="4" name="Image 0" descr="chapter 01 icon">    </p:cNvPr>
           <p:cNvPicPr>
             <a:picLocks noChangeAspect="1"/>
           </p:cNvPicPr>
@@ -15292,7 +15292,7 @@
       </p:sp>
       <p:pic>
         <p:nvPicPr>
-          <p:cNvPr id="10" name="Image 1" descr="/home/user/awsops/docs-site/scripts/pptx/assets/aws_cloud.png">    </p:cNvPr>
+          <p:cNvPr id="10" name="Image 1" descr="chapter 02 icon">    </p:cNvPr>
           <p:cNvPicPr>
             <a:picLocks noChangeAspect="1"/>
           </p:cNvPicPr>
@@ -15478,7 +15478,7 @@
       </p:sp>
       <p:pic>
         <p:nvPicPr>
-          <p:cNvPr id="16" name="Image 2" descr="/home/user/awsops/docs-site/scripts/pptx/assets/gateway.png">    </p:cNvPr>
+          <p:cNvPr id="16" name="Image 2" descr="chapter 03 icon">    </p:cNvPr>
           <p:cNvPicPr>
             <a:picLocks noChangeAspect="1"/>
           </p:cNvPicPr>
@@ -15664,7 +15664,7 @@
       </p:sp>
       <p:pic>
         <p:nvPicPr>
-          <p:cNvPr id="22" name="Image 3" descr="/home/user/awsops/docs-site/scripts/pptx/assets/evaluations.png">    </p:cNvPr>
+          <p:cNvPr id="22" name="Image 3" descr="chapter 04 icon">    </p:cNvPr>
           <p:cNvPicPr>
             <a:picLocks noChangeAspect="1"/>
           </p:cNvPicPr>
@@ -15850,7 +15850,7 @@
       </p:sp>
       <p:pic>
         <p:nvPicPr>
-          <p:cNvPr id="28" name="Image 4" descr="/home/user/awsops/docs-site/scripts/pptx/assets/browser_tool.png">    </p:cNvPr>
+          <p:cNvPr id="28" name="Image 4" descr="chapter 05 icon">    </p:cNvPr>
           <p:cNvPicPr>
             <a:picLocks noChangeAspect="1"/>
           </p:cNvPicPr>
@@ -16030,7 +16030,7 @@
       </p:sp>
       <p:pic>
         <p:nvPicPr>
-          <p:cNvPr id="33" name="Image 5" descr="/home/user/awsops/docs-site/scripts/pptx/assets/aws_logo.png">    </p:cNvPr>
+          <p:cNvPr id="33" name="Image 5" descr="AWS logo">    </p:cNvPr>
           <p:cNvPicPr>
             <a:picLocks noChangeAspect="1"/>
           </p:cNvPicPr>
@@ -16294,7 +16294,7 @@
       </p:sp>
       <p:pic>
         <p:nvPicPr>
-          <p:cNvPr id="6" name="Image 0" descr="/home/user/awsops/docs-site/scripts/pptx/assets/aws_logo_white.png">    </p:cNvPr>
+          <p:cNvPr id="6" name="Image 0" descr="AWS logo">    </p:cNvPr>
           <p:cNvPicPr>
             <a:picLocks noChangeAspect="1"/>
           </p:cNvPicPr>
@@ -17855,7 +17855,7 @@
       </p:sp>
       <p:pic>
         <p:nvPicPr>
-          <p:cNvPr id="44" name="Image 0" descr="/home/user/awsops/docs-site/scripts/pptx/assets/aws_logo.png">    </p:cNvPr>
+          <p:cNvPr id="44" name="Image 0" descr="AWS logo">    </p:cNvPr>
           <p:cNvPicPr>
             <a:picLocks noChangeAspect="1"/>
           </p:cNvPicPr>
@@ -18819,7 +18819,7 @@
       </p:sp>
       <p:pic>
         <p:nvPicPr>
-          <p:cNvPr id="26" name="Image 0" descr="/home/user/awsops/docs-site/scripts/pptx/assets/aws_logo.png">    </p:cNvPr>
+          <p:cNvPr id="26" name="Image 0" descr="AWS logo">    </p:cNvPr>
           <p:cNvPicPr>
             <a:picLocks noChangeAspect="1"/>
           </p:cNvPicPr>
@@ -19001,7 +19001,7 @@
       </p:sp>
       <p:pic>
         <p:nvPicPr>
-          <p:cNvPr id="4" name="Image 0" descr="/home/user/awsops/docs-site/scripts/pptx/assets/aws_logo_white.png">    </p:cNvPr>
+          <p:cNvPr id="4" name="Image 0" descr="AWS logo">    </p:cNvPr>
           <p:cNvPicPr>
             <a:picLocks noChangeAspect="1"/>
           </p:cNvPicPr>
@@ -19267,7 +19267,7 @@
       </p:sp>
       <p:pic>
         <p:nvPicPr>
-          <p:cNvPr id="6" name="Image 0" descr="/home/user/awsops/docs-site/scripts/pptx/assets/aws_logo_white.png">    </p:cNvPr>
+          <p:cNvPr id="6" name="Image 0" descr="AWS logo">    </p:cNvPr>
           <p:cNvPicPr>
             <a:picLocks noChangeAspect="1"/>
           </p:cNvPicPr>
@@ -20688,7 +20688,7 @@
       </p:sp>
       <p:pic>
         <p:nvPicPr>
-          <p:cNvPr id="39" name="Image 0" descr="/home/user/awsops/docs-site/scripts/pptx/assets/aws_logo.png">    </p:cNvPr>
+          <p:cNvPr id="39" name="Image 0" descr="AWS logo">    </p:cNvPr>
           <p:cNvPicPr>
             <a:picLocks noChangeAspect="1"/>
           </p:cNvPicPr>
@@ -21775,7 +21775,7 @@
       </p:sp>
       <p:pic>
         <p:nvPicPr>
-          <p:cNvPr id="30" name="Image 0" descr="/home/user/awsops/docs-site/scripts/pptx/assets/aws_logo.png">    </p:cNvPr>
+          <p:cNvPr id="30" name="Image 0" descr="AWS logo">    </p:cNvPr>
           <p:cNvPicPr>
             <a:picLocks noChangeAspect="1"/>
           </p:cNvPicPr>
@@ -22039,7 +22039,7 @@
       </p:sp>
       <p:pic>
         <p:nvPicPr>
-          <p:cNvPr id="6" name="Image 0" descr="/home/user/awsops/docs-site/scripts/pptx/assets/aws_logo_white.png">    </p:cNvPr>
+          <p:cNvPr id="6" name="Image 0" descr="AWS logo">    </p:cNvPr>
           <p:cNvPicPr>
             <a:picLocks noChangeAspect="1"/>
           </p:cNvPicPr>
@@ -22307,7 +22307,7 @@
       </p:sp>
       <p:pic>
         <p:nvPicPr>
-          <p:cNvPr id="7" name="Image 0" descr="/home/user/awsops/docs-site/scripts/pptx/assets/grad_pill.png">    </p:cNvPr>
+          <p:cNvPr id="7" name="Image 0" descr="gradient pill: 통합">    </p:cNvPr>
           <p:cNvPicPr>
             <a:picLocks noChangeAspect="1"/>
           </p:cNvPicPr>
@@ -22480,7 +22480,7 @@
       </p:sp>
       <p:pic>
         <p:nvPicPr>
-          <p:cNvPr id="12" name="Image 1" descr="/home/user/awsops/docs-site/scripts/pptx/assets/grad_pill.png">    </p:cNvPr>
+          <p:cNvPr id="12" name="Image 1" descr="gradient pill: AI 진단">    </p:cNvPr>
           <p:cNvPicPr>
             <a:picLocks noChangeAspect="1"/>
           </p:cNvPicPr>
@@ -22653,7 +22653,7 @@
       </p:sp>
       <p:pic>
         <p:nvPicPr>
-          <p:cNvPr id="17" name="Image 2" descr="/home/user/awsops/docs-site/scripts/pptx/assets/grad_pill.png">    </p:cNvPr>
+          <p:cNvPr id="17" name="Image 2" descr="gradient pill: 읽기 전용">    </p:cNvPr>
           <p:cNvPicPr>
             <a:picLocks noChangeAspect="1"/>
           </p:cNvPicPr>
@@ -23183,7 +23183,7 @@
       </p:sp>
       <p:pic>
         <p:nvPicPr>
-          <p:cNvPr id="31" name="Image 3" descr="/home/user/awsops/docs-site/scripts/pptx/assets/aws_logo.png">    </p:cNvPr>
+          <p:cNvPr id="31" name="Image 3" descr="AWS logo">    </p:cNvPr>
           <p:cNvPicPr>
             <a:picLocks noChangeAspect="1"/>
           </p:cNvPicPr>
@@ -25242,7 +25242,7 @@
       </p:sp>
       <p:pic>
         <p:nvPicPr>
-          <p:cNvPr id="62" name="Image 0" descr="/home/user/awsops/docs-site/scripts/pptx/assets/aws_logo.png">    </p:cNvPr>
+          <p:cNvPr id="62" name="Image 0" descr="AWS logo">    </p:cNvPr>
           <p:cNvPicPr>
             <a:picLocks noChangeAspect="1"/>
           </p:cNvPicPr>
@@ -25506,7 +25506,7 @@
       </p:sp>
       <p:pic>
         <p:nvPicPr>
-          <p:cNvPr id="6" name="Image 0" descr="/home/user/awsops/docs-site/scripts/pptx/assets/aws_logo_white.png">    </p:cNvPr>
+          <p:cNvPr id="6" name="Image 0" descr="AWS logo">    </p:cNvPr>
           <p:cNvPicPr>
             <a:picLocks noChangeAspect="1"/>
           </p:cNvPicPr>

--- a/docs-site/static/presentation/awsops-intro/awsops-intro.pptx
+++ b/docs-site/static/presentation/awsops-intro/awsops-intro.pptx
@@ -530,7 +530,8 @@
 • 핵심 키워드: 통합 가시성 · AI 진단 · 읽기 전용
 안녕하세요, Solutions Architect 오준석입니다. 오늘은 AWSops라는 AI 기반 AWS·Kubernetes 통합 운영 대시보드를 소개해 드리겠습니다. 여러 계정에 흩어진 리소스와 이미 쓰고 계신 관측 도구를 하나의 읽기 전용 화면으로 모으고, 그 위에서 AI가 장애 원인과 비용 변동을 진단해 주는 플랫폼입니다. 앞의 20분은 문제 정의와 아키텍처, 이어지는 25분은 실제 운영 환경 라이브 데모, 마지막 15분은 질의응답으로 진행하겠습니다.
 [변경 이력]
-• 2026-08-11: 초기 작성</a:t>
+• 2026-08-11: 초기 작성
+• 2026-08-12: AWS Light 테마 재설계</a:t>
             </a:r>
             <a:endParaRPr lang="en-US" dirty="0"/>
           </a:p>
@@ -629,7 +630,8 @@
 [출처]
 • AWSops 아키텍처 문서 — 리포지토리 docs/architecture.md
 [변경 이력]
-• 2026-08-11: 초기 작성</a:t>
+• 2026-08-11: 초기 작성
+• 2026-08-12: AWS Light 테마 재설계</a:t>
             </a:r>
             <a:endParaRPr lang="en-US" dirty="0"/>
           </a:p>
@@ -729,7 +731,8 @@
 [출처]
 • AWSops 결정 기준선 — 리포지토리 docs/decisions/BASELINE.md
 [변경 이력]
-• 2026-08-11: 초기 작성</a:t>
+• 2026-08-11: 초기 작성
+• 2026-08-12: AWS Light 테마 재설계</a:t>
             </a:r>
             <a:endParaRPr lang="en-US" dirty="0"/>
           </a:p>
@@ -828,7 +831,8 @@
 [출처]
 • AWSops 결정 기준선 — 리포지토리 docs/decisions/BASELINE.md
 [변경 이력]
-• 2026-08-11: 초기 작성</a:t>
+• 2026-08-11: 초기 작성
+• 2026-08-12: AWS Light 테마 재설계</a:t>
             </a:r>
             <a:endParaRPr lang="en-US" dirty="0"/>
           </a:p>
@@ -927,7 +931,8 @@
 [출처]
 • AWSops 워커 레퍼런스 — 리포지토리 docs/reference/06-workers.md
 [변경 이력]
-• 2026-08-11: 초기 작성</a:t>
+• 2026-08-11: 초기 작성
+• 2026-08-12: AWS Light 테마 재설계</a:t>
             </a:r>
             <a:endParaRPr lang="en-US" dirty="0"/>
           </a:p>
@@ -1025,7 +1030,8 @@
 [출처]
 • AWSops 결정 기준선 — 리포지토리 docs/decisions/BASELINE.md
 [변경 이력]
-• 2026-08-11: 초기 작성</a:t>
+• 2026-08-11: 초기 작성
+• 2026-08-12: AWS Light 테마 재설계</a:t>
             </a:r>
             <a:endParaRPr lang="en-US" dirty="0"/>
           </a:p>
@@ -1118,7 +1124,8 @@
 • 각 가치는 데모 시나리오와 1:1 연결
 네 번째 챕터입니다. 앞서 말씀드린 네 가지 페인에 하나씩 답을 드리겠습니다. 각 가치는 잠시 후 라이브 데모 시나리오와 일대일로 연결됩니다.
 [변경 이력]
-• 2026-08-11: 초기 작성</a:t>
+• 2026-08-11: 초기 작성
+• 2026-08-12: AWS Light 테마 재설계</a:t>
             </a:r>
             <a:endParaRPr lang="en-US" dirty="0"/>
           </a:p>
@@ -1212,7 +1219,8 @@
 • 외부 도구 8종은 read-only 연동으로 근거 데이터화
 첫 번째 가치는 통합 가시성입니다. 왼쪽 — 사이드바의 스코프 셀렉터에서 계정과 리전을 골라 놓으면, 인벤토리·비용·보안 등 모든 페이지가 그 스코프로 즉시 재집계됩니다. 계정별 조회는 병렬로 처리되어 계정이 늘어도 대기 시간이 완만하고, 표에는 어느 계정의 것인지 Account 컬럼이 항상 붙습니다. 오른쪽 — 이미 쓰고 계신 관측 도구 여덟 종을 읽기 전용 데이터소스로 등록하면, ClickHouse의 트레이스가 서비스 호출 지도를 그리고 Prometheus의 메트릭이 AI 진단의 근거로 들어옵니다. 기존 도구를 대체하는 게 아니라, 그 데이터를 '판단의 근거'로 승격시키는 것입니다.
 [변경 이력]
-• 2026-08-11: 초기 작성</a:t>
+• 2026-08-11: 초기 작성
+• 2026-08-12: AWS Light 테마 재설계</a:t>
             </a:r>
             <a:endParaRPr lang="en-US" dirty="0"/>
           </a:p>
@@ -1309,7 +1317,8 @@
 • NFM(Network Flow Monitor): CloudWatch 기반 네트워크 플로우 관측 서비스
 • TGW(Transit Gateway): VPC 간 중계 허브 게이트웨이
 [변경 이력]
-• 2026-08-11: 초기 작성</a:t>
+• 2026-08-11: 초기 작성
+• 2026-08-12: AWS Light 테마 재설계</a:t>
             </a:r>
             <a:endParaRPr lang="en-US" dirty="0"/>
           </a:p>
@@ -1406,7 +1415,8 @@
 • MoM(Month over Month): 전월 대비 증감률
 • OpenCost: 쿠버네티스 비용 배분 오픈소스 표준
 [변경 이력]
-• 2026-08-11: 초기 작성</a:t>
+• 2026-08-11: 초기 작성
+• 2026-08-12: AWS Light 테마 재설계</a:t>
             </a:r>
             <a:endParaRPr lang="en-US" dirty="0"/>
           </a:p>
@@ -1504,7 +1514,8 @@
 [출처]
 • AWSops 진단 섹션 카탈로그 — 리포지토리 scripts/v2/workers/diagnosis/sections.py
 [변경 이력]
-• 2026-08-11: 초기 작성</a:t>
+• 2026-08-11: 초기 작성
+• 2026-08-12: AWS Light 테마 재설계</a:t>
             </a:r>
             <a:endParaRPr lang="en-US" dirty="0"/>
           </a:p>
@@ -1597,7 +1608,8 @@
 • 발표 20분(챕터 1~4) + 데모 25분(챕터 5) + Q&amp;A 15분
 오늘 세션은 다섯 개 챕터로 진행합니다. 먼저 왜 이런 도구가 필요한지 운영 현장의 이야기로 시작하고, AWSops가 무엇인지 한 장으로 정리한 뒤, 아키텍처를 깊이 들여다보겠습니다. 이어서 네 가지 핵심 가치를 데모 시나리오와 연결해 설명드리고, 마지막 25분은 슬라이드가 아니라 실제 운영 중인 환경에서 라이브로 보여드리겠습니다.
 [변경 이력]
-• 2026-08-11: 초기 작성</a:t>
+• 2026-08-11: 초기 작성
+• 2026-08-12: AWS Light 테마 재설계</a:t>
             </a:r>
             <a:endParaRPr lang="en-US" dirty="0"/>
           </a:p>
@@ -1690,7 +1702,8 @@
 • 스테이징·목업이 아닌 실운영 환경 강조
 다섯 번째 챕터입니다. 지금부터는 슬라이드가 아니라 실제 운영 중인 환경을 그대로 보여드리겠습니다. 스테이징이 아니라 저희가 매일 쓰는 화면입니다.
 [변경 이력]
-• 2026-08-11: 초기 작성</a:t>
+• 2026-08-11: 초기 작성
+• 2026-08-12: AWS Light 테마 재설계</a:t>
             </a:r>
             <a:endParaRPr lang="en-US" dirty="0"/>
           </a:p>
@@ -1784,7 +1797,8 @@
 • WA 리포트는 사전 생성본 + 라이브 실행 병행
 데모 로드맵입니다. 먼저 4분간 통합 대시보드를 투어하면서 멀티계정 스코프와 경고에서 조치 방법까지 3클릭 동선을 보여드립니다. 이어서 8분간 장애 원인 추적 — 토폴로지 포커스 모드에서 시작해 네트워크 홉 경로, AI 인시던트 분석까지 갑니다. 세 번째는 비용 급증 원인 분석 6분, 네 번째는 Well-Architected 리포트 5분입니다. 마지막 2분은 연동과 계정 관리 화면으로 '읽기 전용 신뢰'를 다시 확인하며 마무리합니다. 지금 보시는 순서 그대로 진행하겠습니다.
 [변경 이력]
-• 2026-08-11: 초기 작성</a:t>
+• 2026-08-11: 초기 작성
+• 2026-08-12: AWS Light 테마 재설계</a:t>
             </a:r>
             <a:endParaRPr lang="en-US" dirty="0"/>
           </a:p>
@@ -1877,7 +1891,8 @@
 • 권한 최소 · AI 근거 강제 · 기존 도구 연동
 질의응답에 앞서, 도입을 검토하실 때 반드시 나오는 세 가지 질문에 미리 답을 드립니다. 첫째, 권한은 계정당 읽기 전용 역할 하나입니다. 둘째, AI는 수집된 데이터에만 근거하도록 강제되고 모든 발견에 근거가 붙습니다 — 읽기 전용이라 틀려도 인프라에는 아무 일도 없습니다. Bedrock은 고객 데이터를 학습에 사용하지 않습니다. 셋째, 기존 관측 도구는 버리는 게 아니라 연동해서 판단의 근거로 승격시킵니다. 이 외의 질문은 지금부터 편하게 주시면 됩니다.
 [변경 이력]
-• 2026-08-11: 초기 작성</a:t>
+• 2026-08-11: 초기 작성
+• 2026-08-12: AWS Light 테마 재설계</a:t>
             </a:r>
             <a:endParaRPr lang="en-US" dirty="0"/>
           </a:p>
@@ -1969,7 +1984,8 @@
 • 클로징 멘트 + Q&amp;A 초대
 운영을 오래 하면서 배운 것은, 좋은 도구란 일을 대신해 주는 도구가 아니라 판단을 빠르게 해 주는 도구라는 점입니다. AWSops에는 변경 버튼이 하나도 없는 대신, 새벽 3시에 '어디를 봐야 하는지'를 30초 안에 알려줍니다. 그 30초를 위해 만든 제품입니다. 감사합니다 — 질문 주시면 답변드리겠습니다.
 [변경 이력]
-• 2026-08-11: 초기 작성</a:t>
+• 2026-08-11: 초기 작성
+• 2026-08-12: AWS Light 테마 재설계</a:t>
             </a:r>
             <a:endParaRPr lang="en-US" dirty="0"/>
           </a:p>
@@ -2062,7 +2078,8 @@
 • 페인 4개를 청중의 언어로 명명
 첫 번째 챕터입니다. 기능 이야기 전에, 이 도구가 왜 만들어졌는지 — 운영 현장에서 실제로 겪는 새벽의 장애 대응 이야기부터 시작하겠습니다.
 [변경 이력]
-• 2026-08-11: 초기 작성</a:t>
+• 2026-08-11: 초기 작성
+• 2026-08-12: AWS Light 테마 재설계</a:t>
             </a:r>
             <a:endParaRPr lang="en-US" dirty="0"/>
           </a:p>
@@ -2158,7 +2175,8 @@
 [약어]
 • MTTR(Mean Time To Recovery): 장애 발생부터 복구까지의 평균 소요 시간
 [변경 이력]
-• 2026-08-11: 초기 작성</a:t>
+• 2026-08-11: 초기 작성
+• 2026-08-12: AWS Light 테마 재설계</a:t>
             </a:r>
             <a:endParaRPr lang="en-US" dirty="0"/>
           </a:p>
@@ -2253,7 +2271,8 @@
 [약어]
 • RCA(Root Cause Analysis): 장애·이상 현상의 근본 원인 분석
 [변경 이력]
-• 2026-08-11: 초기 작성</a:t>
+• 2026-08-11: 초기 작성
+• 2026-08-12: AWS Light 테마 재설계</a:t>
             </a:r>
             <a:endParaRPr lang="en-US" dirty="0"/>
           </a:p>
@@ -2345,7 +2364,8 @@
 • AWSops 한 문장 정의와 기능 맵 소개
 두 번째 챕터입니다. AWSops가 무엇인지 한 문장으로 정의하고, 전체 기능을 운영 동선 관점에서 훑어보겠습니다.
 [변경 이력]
-• 2026-08-11: 초기 작성</a:t>
+• 2026-08-11: 초기 작성
+• 2026-08-12: AWS Light 테마 재설계</a:t>
             </a:r>
             <a:endParaRPr lang="en-US" dirty="0"/>
           </a:p>
@@ -2441,7 +2461,8 @@
 [출처]
 • AWSops 아키텍처 문서 — 리포지토리 docs/architecture.md
 [변경 이력]
-• 2026-08-11: 초기 작성</a:t>
+• 2026-08-11: 초기 작성
+• 2026-08-12: AWS Light 테마 재설계</a:t>
             </a:r>
             <a:endParaRPr lang="en-US" dirty="0"/>
           </a:p>
@@ -2538,7 +2559,8 @@
 • NFM(Network Flow Monitor): CloudWatch 기반 네트워크 플로우 관측 서비스
 • WA(Well-Architected): AWS 6기둥 아키텍처 모범사례 프레임워크
 [변경 이력]
-• 2026-08-11: 초기 작성</a:t>
+• 2026-08-11: 초기 작성
+• 2026-08-12: AWS Light 테마 재설계</a:t>
             </a:r>
             <a:endParaRPr lang="en-US" dirty="0"/>
           </a:p>
@@ -2631,7 +2653,8 @@
 • 실무 관점의 안전 설계 근거 제시
 세 번째 챕터, 아키텍처입니다. 전체 그림 한 장을 먼저 보고, 프라이빗 엣지 · AI 레이어 · 비동기 워커 · 안전 설계 순으로 깊이 들어가겠습니다.
 [변경 이력]
-• 2026-08-11: 초기 작성</a:t>
+• 2026-08-11: 초기 작성
+• 2026-08-12: AWS Light 테마 재설계</a:t>
             </a:r>
             <a:endParaRPr lang="en-US" dirty="0"/>
           </a:p>

--- a/docs-site/static/presentation/awsops-intro/awsops-intro.pptx
+++ b/docs-site/static/presentation/awsops-intro/awsops-intro.pptx
@@ -7578,7 +7578,7 @@
       </p:sp>
       <p:pic>
         <p:nvPicPr>
-          <p:cNvPr id="30" name="Image 1" descr="gateway icon">    </p:cNvPr>
+          <p:cNvPr id="30" name="Image 1" descr="aws_cloud icon">    </p:cNvPr>
           <p:cNvPicPr>
             <a:picLocks noChangeAspect="1"/>
           </p:cNvPicPr>
@@ -7737,7 +7737,7 @@
       </p:sp>
       <p:pic>
         <p:nvPicPr>
-          <p:cNvPr id="35" name="Image 2" descr="memory icon">    </p:cNvPr>
+          <p:cNvPr id="35" name="Image 2" descr="evaluations icon">    </p:cNvPr>
           <p:cNvPicPr>
             <a:picLocks noChangeAspect="1"/>
           </p:cNvPicPr>

--- a/docs-site/static/presentation/awsops-intro/awsops-intro.pptx
+++ b/docs-site/static/presentation/awsops-intro/awsops-intro.pptx
@@ -22330,7 +22330,7 @@
       </p:sp>
       <p:pic>
         <p:nvPicPr>
-          <p:cNvPr id="7" name="Image 0" descr="gradient pill: 통합">    </p:cNvPr>
+          <p:cNvPr id="7" name="Image 0" descr="decorative gradient band">    </p:cNvPr>
           <p:cNvPicPr>
             <a:picLocks noChangeAspect="1"/>
           </p:cNvPicPr>
@@ -22503,7 +22503,7 @@
       </p:sp>
       <p:pic>
         <p:nvPicPr>
-          <p:cNvPr id="12" name="Image 1" descr="gradient pill: AI 진단">    </p:cNvPr>
+          <p:cNvPr id="12" name="Image 1" descr="decorative gradient band">    </p:cNvPr>
           <p:cNvPicPr>
             <a:picLocks noChangeAspect="1"/>
           </p:cNvPicPr>
@@ -22676,7 +22676,7 @@
       </p:sp>
       <p:pic>
         <p:nvPicPr>
-          <p:cNvPr id="17" name="Image 2" descr="gradient pill: 읽기 전용">    </p:cNvPr>
+          <p:cNvPr id="17" name="Image 2" descr="decorative gradient band">    </p:cNvPr>
           <p:cNvPicPr>
             <a:picLocks noChangeAspect="1"/>
           </p:cNvPicPr>
